--- a/CookBook_Full_Presentation.pptx
+++ b/CookBook_Full_Presentation.pptx
@@ -14,6 +14,7 @@
     <p:sldId id="262" r:id="rId14"/>
     <p:sldId id="263" r:id="rId15"/>
     <p:sldId id="264" r:id="rId16"/>
+    <p:sldId id="265" r:id="rId17"/>
   </p:sldIdLst>
   <p:sldSz cx="12191695" cy="6858000" type="screen4x3"/>
   <p:notesSz cx="6858000" cy="9144000"/>
@@ -510,7 +511,77 @@
           <a:lstStyle/>
           <a:p>
             <a:r>
-              <a:t>Chào hội đồng. Sau đây chúng em xin trình bày tổng thể toàn bộ kiến trúc và chức năng của ứng dụng CookBook.</a:t>
+              <a:t>Chào hội đồng. Hôm nay chúng em xin trình bày đồ án CookBook - Cẩm nang nấu ăn và đi chợ thông minh.</a:t>
+            </a:r>
+          </a:p>
+        </p:txBody>
+      </p:sp>
+      <p:sp>
+        <p:nvSpPr>
+          <p:cNvPr id="4" name="Slide Number Placeholder 3"/>
+          <p:cNvSpPr>
+            <a:spLocks noGrp="1"/>
+          </p:cNvSpPr>
+          <p:nvPr>
+            <p:ph type="sldNum" idx="5" sz="quarter"/>
+          </p:nvPr>
+        </p:nvSpPr>
+        <p:spPr/>
+      </p:sp>
+    </p:spTree>
+  </p:cSld>
+  <p:clrMapOvr>
+    <a:masterClrMapping/>
+  </p:clrMapOvr>
+</p:notes>
+</file>
+
+<file path=ppt/notesSlides/notesSlide10.xml><?xml version="1.0" encoding="utf-8"?>
+<p:notes xmlns:a="http://schemas.openxmlformats.org/drawingml/2006/main" xmlns:p="http://schemas.openxmlformats.org/presentationml/2006/main" xmlns:r="http://schemas.openxmlformats.org/officeDocument/2006/relationships">
+  <p:cSld>
+    <p:spTree>
+      <p:nvGrpSpPr>
+        <p:cNvPr id="1" name=""/>
+        <p:cNvGrpSpPr/>
+        <p:nvPr/>
+      </p:nvGrpSpPr>
+      <p:grpSpPr>
+        <a:xfrm>
+          <a:off x="0" y="0"/>
+          <a:ext cx="0" cy="0"/>
+          <a:chOff x="0" y="0"/>
+          <a:chExt cx="0" cy="0"/>
+        </a:xfrm>
+      </p:grpSpPr>
+      <p:sp>
+        <p:nvSpPr>
+          <p:cNvPr id="2" name="Slide Image Placeholder 1"/>
+          <p:cNvSpPr>
+            <a:spLocks noGrp="1"/>
+          </p:cNvSpPr>
+          <p:nvPr>
+            <p:ph type="sldImg" idx="2"/>
+          </p:nvPr>
+        </p:nvSpPr>
+        <p:spPr/>
+      </p:sp>
+      <p:sp>
+        <p:nvSpPr>
+          <p:cNvPr id="3" name="Notes Placeholder 2"/>
+          <p:cNvSpPr>
+            <a:spLocks noGrp="1"/>
+          </p:cNvSpPr>
+          <p:nvPr>
+            <p:ph type="body" idx="3" sz="quarter"/>
+          </p:nvPr>
+        </p:nvSpPr>
+        <p:spPr/>
+        <p:txBody>
+          <a:bodyPr/>
+          <a:lstStyle/>
+          <a:p>
+            <a:r>
+              <a:t>Chúng em đã hoàn thành toàn bộ mục tiêu của đề tài CookBook. Hướng phát triển tiếp theo là tăng cường bảo mật mật khẩu, đồng bộ đám mây và gợi ý thực đơn bằng AI.</a:t>
             </a:r>
           </a:p>
         </p:txBody>
@@ -580,7 +651,7 @@
           <a:lstStyle/>
           <a:p>
             <a:r>
-              <a:t>Ứng dụng giải quyết trọn vẹn quy trình nấu ăn của người dùng từ khâu khởi động, tra cứu món, tính calo dinh dưỡng đến đi chợ.</a:t>
+              <a:t>Chúng em đặt ra bài toán giải quyết khó khăn khi lên thực đơn và đi chợ. Giải pháp CookBook kết nối khép kín hai khâu này.</a:t>
             </a:r>
           </a:p>
         </p:txBody>
@@ -650,7 +721,7 @@
           <a:lstStyle/>
           <a:p>
             <a:r>
-              <a:t>Chúng em thiết kế ứng dụng dạng Single Activity kết hợp đa Fragment. SQLite và SharedPreferences đảm nhận lưu trữ offline và quản lý tài khoản người dùng.</a:t>
+              <a:t>Ứng dụng gồm 4 phần chức năng chính: Hệ thống tài khoản, Tra cứu chi tiết công thức, Quản lý yêu thích &amp; dinh dưỡng, Đi chợ &amp; Lịch sử.</a:t>
             </a:r>
           </a:p>
         </p:txBody>
@@ -720,7 +791,7 @@
           <a:lstStyle/>
           <a:p>
             <a:r>
-              <a:t>Luồng nghiệp vụ đi xuyên suốt từ khi mở màn hình Splash, thực hiện đăng nhập, duyệt món ăn ở Trang chủ, xem chi tiết công thức, lưu yêu thích hoặc thêm vào danh sách đi chợ, cuối cùng là đánh dấu mua sắm thành công.</a:t>
+              <a:t>Chúng em sử dụng Java Android SDK thuần để tối ưu hiệu năng thiết bị. SQLite quản lý dữ liệu offline kết hợp cơ chế khóa ngoại và SharedPreferences duy trì phiên.</a:t>
             </a:r>
           </a:p>
         </p:txBody>
@@ -790,7 +861,7 @@
           <a:lstStyle/>
           <a:p>
             <a:r>
-              <a:t>Trang chủ hiển thị danh mục và món ăn phổ biến. Để tìm kiếm tiếng Việt tốt hơn, chúng em phát triển bộ chuẩn hóa không dấu StringHelper giúp người dùng gõ tìm kiếm không dấu tiện lợi.</a:t>
+              <a:t>Luồng trải nghiệm đi liền mạch từ lúc mở màn hình Splash, thực hiện đăng nhập, duyệt món ăn, xem chi tiết, yêu thích, đi chợ và hoàn thành nấu nướng.</a:t>
             </a:r>
           </a:p>
         </p:txBody>
@@ -860,7 +931,7 @@
           <a:lstStyle/>
           <a:p>
             <a:r>
-              <a:t>Màn hình chi tiết hiển thị đầy đủ nguyên liệu, các bước thực hiện và lượng Calo. Từ đây người dùng có hai nút tương tác chính là Thả tim yêu thích và Thêm nguyên liệu trực tiếp vào danh sách đi chợ.</a:t>
+              <a:t>Trang chủ giúp người dùng duyệt danh mục món ăn nhanh chóng, tích hợp tìm kiếm không dấu thân thiện cho người dùng Việt Nam.</a:t>
             </a:r>
           </a:p>
         </p:txBody>
@@ -930,7 +1001,7 @@
           <a:lstStyle/>
           <a:p>
             <a:r>
-              <a:t>Màn yêu thích hiển thị dạng lưới và có bộ lọc theo nhiều tiêu chí. Thống kê Calo trung bình và thời gian nấu được tính toán trực tiếp trên RAM giúp nâng cao tốc độ tải của app.</a:t>
+              <a:t>Màn hình chi tiết công thức là nơi hiển thị Calo và các bước nấu ăn. Người dùng có thể thả tim yêu thích và bấm thêm nguyên liệu đi chợ trực tiếp từ đây.</a:t>
             </a:r>
           </a:p>
         </p:txBody>
@@ -1000,7 +1071,7 @@
           <a:lstStyle/>
           <a:p>
             <a:r>
-              <a:t>Phần đi chợ sử dụng RecyclerView lồng nhau để hiển thị nguyên liệu theo nhóm món ăn. Khi hoàn tất nấu nướng, món ăn sẽ được ghi nhận vào lịch sử CookHistory của người dùng.</a:t>
+              <a:t>Màn hình Yêu thích hiển thị danh sách dạng lưới 2 cột. Việc thống kê Calo trung bình được tính toán trực tiếp trên RAM thay vì gọi query cơ sở dữ liệu liên tục để tối ưu hiệu năng.</a:t>
             </a:r>
           </a:p>
         </p:txBody>
@@ -1070,7 +1141,7 @@
           <a:lstStyle/>
           <a:p>
             <a:r>
-              <a:t>Chúng em đã hoàn thành toàn bộ các phân hệ từ Splash, Home, Detail, Favorites, Grocery List đến Profile. Tương lai nhóm hướng tới nâng cấp bảo mật và tích hợp đồng bộ dữ liệu trực tuyến.</a:t>
+              <a:t>Màn đi chợ gom nhóm nguyên liệu theo từng món qua RecyclerView lồng nhau. ProgressBar hiển thị tiến độ hoàn thành theo thời gian thực và đổi màu động khi mua xong.</a:t>
             </a:r>
           </a:p>
         </p:txBody>
@@ -4093,7 +4164,7 @@
         <p:spPr>
           <a:xfrm>
             <a:off x="0" y="0"/>
-            <a:ext cx="274320" cy="6858000"/>
+            <a:ext cx="4114800" cy="6858000"/>
           </a:xfrm>
           <a:prstGeom prst="rect">
             <a:avLst/>
@@ -4102,9 +4173,7 @@
             <a:srgbClr val="FF6B35"/>
           </a:solidFill>
           <a:ln>
-            <a:solidFill>
-              <a:srgbClr val="FF6B35"/>
-            </a:solidFill>
+            <a:noFill/>
           </a:ln>
         </p:spPr>
         <p:style>
@@ -4137,8 +4206,8 @@
         </p:nvSpPr>
         <p:spPr>
           <a:xfrm>
-            <a:off x="914400" y="2011680"/>
-            <a:ext cx="10332720" cy="2011680"/>
+            <a:off x="457200" y="1371600"/>
+            <a:ext cx="3200400" cy="4114800"/>
           </a:xfrm>
           <a:prstGeom prst="rect">
             <a:avLst/>
@@ -4152,28 +4221,39 @@
           <a:lstStyle/>
           <a:p>
             <a:pPr>
-              <a:defRPr sz="5600" b="1">
-                <a:solidFill>
-                  <a:srgbClr val="FF6B35"/>
-                </a:solidFill>
-                <a:latin typeface="Arial"/>
-              </a:defRPr>
-            </a:pPr>
-            <a:r>
-              <a:t>COOKBOOK APP</a:t>
+              <a:spcAft>
+                <a:spcPts val="2000"/>
+              </a:spcAft>
+              <a:defRPr sz="2800" b="1">
+                <a:solidFill>
+                  <a:srgbClr val="FFFFFF"/>
+                </a:solidFill>
+                <a:latin typeface="Arial"/>
+              </a:defRPr>
+            </a:pPr>
+            <a:r>
+              <a:t>MOBILE APP</a:t>
+            </a:r>
+            <a:br/>
+            <a:r>
+              <a:t>DEVELOPMENT</a:t>
             </a:r>
           </a:p>
           <a:p>
             <a:pPr>
-              <a:defRPr sz="2200" b="1">
-                <a:solidFill>
-                  <a:srgbClr val="FFFFFF"/>
-                </a:solidFill>
-                <a:latin typeface="Arial"/>
-              </a:defRPr>
-            </a:pPr>
-            <a:r>
-              <a:t>Hệ thống Cẩm nang Nấu ăn &amp; Đi chợ toàn diện trên Android</a:t>
+              <a:defRPr sz="1600">
+                <a:solidFill>
+                  <a:srgbClr val="2B2D42"/>
+                </a:solidFill>
+                <a:latin typeface="Arial"/>
+              </a:defRPr>
+            </a:pPr>
+            <a:r>
+              <a:t>ĐỒ ÁN PHÁT TRIỂN</a:t>
+            </a:r>
+            <a:br/>
+            <a:r>
+              <a:t>ỨNG DỤNG DI ĐỘNG</a:t>
             </a:r>
           </a:p>
         </p:txBody>
@@ -4186,8 +4266,8 @@
         </p:nvSpPr>
         <p:spPr>
           <a:xfrm>
-            <a:off x="914400" y="4389120"/>
-            <a:ext cx="7315200" cy="1371600"/>
+            <a:off x="4754880" y="1828800"/>
+            <a:ext cx="6858000" cy="2743200"/>
           </a:xfrm>
           <a:prstGeom prst="rect">
             <a:avLst/>
@@ -4195,6 +4275,55 @@
           <a:noFill/>
         </p:spPr>
         <p:txBody>
+          <a:bodyPr wrap="square">
+            <a:spAutoFit/>
+          </a:bodyPr>
+          <a:lstStyle/>
+          <a:p>
+            <a:pPr>
+              <a:defRPr sz="5600" b="1">
+                <a:solidFill>
+                  <a:srgbClr val="FF6B35"/>
+                </a:solidFill>
+                <a:latin typeface="Arial"/>
+              </a:defRPr>
+            </a:pPr>
+            <a:r>
+              <a:t>COOKBOOK APP</a:t>
+            </a:r>
+          </a:p>
+          <a:p>
+            <a:pPr>
+              <a:defRPr sz="2000" b="1">
+                <a:solidFill>
+                  <a:srgbClr val="FFFFFF"/>
+                </a:solidFill>
+                <a:latin typeface="Arial"/>
+              </a:defRPr>
+            </a:pPr>
+            <a:r>
+              <a:t>Cẩm nang nấu ăn &amp; Đi chợ thông minh toàn diện</a:t>
+            </a:r>
+          </a:p>
+        </p:txBody>
+      </p:sp>
+      <p:sp>
+        <p:nvSpPr>
+          <p:cNvPr id="5" name="TextBox 4"/>
+          <p:cNvSpPr txBox="1"/>
+          <p:nvPr/>
+        </p:nvSpPr>
+        <p:spPr>
+          <a:xfrm>
+            <a:off x="4754880" y="4389120"/>
+            <a:ext cx="6858000" cy="1645920"/>
+          </a:xfrm>
+          <a:prstGeom prst="rect">
+            <a:avLst/>
+          </a:prstGeom>
+          <a:noFill/>
+        </p:spPr>
+        <p:txBody>
           <a:bodyPr wrap="none">
             <a:spAutoFit/>
           </a:bodyPr>
@@ -4202,9 +4331,9 @@
           <a:p>
             <a:pPr>
               <a:spcAft>
-                <a:spcPts val="500"/>
+                <a:spcPts val="400"/>
               </a:spcAft>
-              <a:defRPr sz="1500" b="1">
+              <a:defRPr sz="1400" b="1">
                 <a:solidFill>
                   <a:srgbClr val="FFFFFF"/>
                 </a:solidFill>
@@ -4212,23 +4341,338 @@
               </a:defRPr>
             </a:pPr>
             <a:r>
-              <a:t>• Báo cáo tổng thể toàn bộ các chức năng trong hệ thống</a:t>
+              <a:t>• Sinh viên thực hiện: Nguyễn Văn An - Nguyễn Trung Hiếu - Nguyễn Tuấn Đạt</a:t>
             </a:r>
           </a:p>
           <a:p>
             <a:pPr>
               <a:spcAft>
-                <a:spcPts val="500"/>
+                <a:spcPts val="400"/>
+              </a:spcAft>
+              <a:defRPr sz="1200" b="0">
+                <a:solidFill>
+                  <a:srgbClr val="8C919E"/>
+                </a:solidFill>
+                <a:latin typeface="Arial"/>
+              </a:defRPr>
+            </a:pPr>
+            <a:r>
+              <a:t>• Giáo viên hướng dẫn: Bộ môn Phát triển Ứng dụng Di động</a:t>
+            </a:r>
+          </a:p>
+        </p:txBody>
+      </p:sp>
+    </p:spTree>
+  </p:cSld>
+  <p:clrMapOvr>
+    <a:masterClrMapping/>
+  </p:clrMapOvr>
+</p:sld>
+</file>
+
+<file path=ppt/slides/slide10.xml><?xml version="1.0" encoding="utf-8"?>
+<p:sld xmlns:a="http://schemas.openxmlformats.org/drawingml/2006/main" xmlns:p="http://schemas.openxmlformats.org/presentationml/2006/main" xmlns:r="http://schemas.openxmlformats.org/officeDocument/2006/relationships">
+  <p:cSld>
+    <p:bg>
+      <p:bgPr>
+        <a:solidFill>
+          <a:srgbClr val="F5F7FA"/>
+        </a:solidFill>
+        <a:effectLst/>
+      </p:bgPr>
+    </p:bg>
+    <p:spTree>
+      <p:nvGrpSpPr>
+        <p:cNvPr id="1" name=""/>
+        <p:cNvGrpSpPr/>
+        <p:nvPr/>
+      </p:nvGrpSpPr>
+      <p:grpSpPr/>
+      <p:sp>
+        <p:nvSpPr>
+          <p:cNvPr id="2" name="TextBox 1"/>
+          <p:cNvSpPr txBox="1"/>
+          <p:nvPr/>
+        </p:nvSpPr>
+        <p:spPr>
+          <a:xfrm>
+            <a:off x="685800" y="365760"/>
+            <a:ext cx="10820095" cy="731520"/>
+          </a:xfrm>
+          <a:prstGeom prst="rect">
+            <a:avLst/>
+          </a:prstGeom>
+          <a:noFill/>
+        </p:spPr>
+        <p:txBody>
+          <a:bodyPr wrap="square" lIns="0" tIns="0" rIns="0" bIns="0">
+            <a:spAutoFit/>
+          </a:bodyPr>
+          <a:lstStyle/>
+          <a:p>
+            <a:pPr>
+              <a:defRPr sz="2400" b="1">
+                <a:solidFill>
+                  <a:srgbClr val="2B2D42"/>
+                </a:solidFill>
+                <a:latin typeface="Arial"/>
+              </a:defRPr>
+            </a:pPr>
+            <a:r>
+              <a:t>XÁC THỰC, CÁ NHÂN &amp; KẾT LUẬN</a:t>
+            </a:r>
+          </a:p>
+        </p:txBody>
+      </p:sp>
+      <p:sp>
+        <p:nvSpPr>
+          <p:cNvPr id="3" name="Rectangle 2"/>
+          <p:cNvSpPr/>
+          <p:nvPr/>
+        </p:nvSpPr>
+        <p:spPr>
+          <a:xfrm>
+            <a:off x="685800" y="1051560"/>
+            <a:ext cx="1097280" cy="54864"/>
+          </a:xfrm>
+          <a:prstGeom prst="rect">
+            <a:avLst/>
+          </a:prstGeom>
+          <a:solidFill>
+            <a:srgbClr val="FF6B35"/>
+          </a:solidFill>
+          <a:ln>
+            <a:noFill/>
+          </a:ln>
+        </p:spPr>
+        <p:style>
+          <a:lnRef idx="1">
+            <a:schemeClr val="accent1"/>
+          </a:lnRef>
+          <a:fillRef idx="3">
+            <a:schemeClr val="accent1"/>
+          </a:fillRef>
+          <a:effectRef idx="2">
+            <a:schemeClr val="accent1"/>
+          </a:effectRef>
+          <a:fontRef idx="minor">
+            <a:schemeClr val="lt1"/>
+          </a:fontRef>
+        </p:style>
+        <p:txBody>
+          <a:bodyPr rtlCol="0" anchor="ctr"/>
+          <a:lstStyle/>
+          <a:p>
+            <a:pPr algn="ctr"/>
+          </a:p>
+        </p:txBody>
+      </p:sp>
+      <p:sp>
+        <p:nvSpPr>
+          <p:cNvPr id="4" name="Rounded Rectangle 3"/>
+          <p:cNvSpPr/>
+          <p:nvPr/>
+        </p:nvSpPr>
+        <p:spPr>
+          <a:xfrm>
+            <a:off x="685800" y="1645920"/>
+            <a:ext cx="5120640" cy="4114800"/>
+          </a:xfrm>
+          <a:prstGeom prst="roundRect">
+            <a:avLst/>
+          </a:prstGeom>
+          <a:solidFill>
+            <a:srgbClr val="2B2D42"/>
+          </a:solidFill>
+          <a:ln>
+            <a:noFill/>
+          </a:ln>
+        </p:spPr>
+        <p:style>
+          <a:lnRef idx="1">
+            <a:schemeClr val="accent1"/>
+          </a:lnRef>
+          <a:fillRef idx="3">
+            <a:schemeClr val="accent1"/>
+          </a:fillRef>
+          <a:effectRef idx="2">
+            <a:schemeClr val="accent1"/>
+          </a:effectRef>
+          <a:fontRef idx="minor">
+            <a:schemeClr val="lt1"/>
+          </a:fontRef>
+        </p:style>
+        <p:txBody>
+          <a:bodyPr rtlCol="0" anchor="ctr" wrap="square" lIns="274320" rIns="274320" tIns="274320"/>
+          <a:lstStyle/>
+          <a:p>
+            <a:pPr algn="ctr">
+              <a:spcAft>
+                <a:spcPts val="1500"/>
+              </a:spcAft>
+              <a:defRPr sz="1800" b="1">
+                <a:solidFill>
+                  <a:srgbClr val="FF6B35"/>
+                </a:solidFill>
+                <a:latin typeface="Arial"/>
+              </a:defRPr>
+            </a:pPr>
+            <a:r>
+              <a:t>KẾT QUẢ ĐÃ ĐẠT ĐƯỢC</a:t>
+            </a:r>
+          </a:p>
+          <a:p>
+            <a:pPr>
+              <a:spcAft>
+                <a:spcPts val="800"/>
               </a:spcAft>
               <a:defRPr sz="1300" b="0">
                 <a:solidFill>
-                  <a:srgbClr val="8C919E"/>
-                </a:solidFill>
-                <a:latin typeface="Arial"/>
-              </a:defRPr>
-            </a:pPr>
-            <a:r>
-              <a:t>• Ngôn ngữ: Java  |  CSDL: SQLite cục bộ</a:t>
+                  <a:srgbClr val="FFFFFF"/>
+                </a:solidFill>
+                <a:latin typeface="Arial"/>
+              </a:defRPr>
+            </a:pPr>
+            <a:r>
+              <a:t>✓ Hoàn thành luồng nghiệp vụ khép kín từ Đăng nhập, Duyệt món, Lưu trữ đến Đi chợ.</a:t>
+            </a:r>
+          </a:p>
+          <a:p>
+            <a:pPr>
+              <a:spcAft>
+                <a:spcPts val="800"/>
+              </a:spcAft>
+              <a:defRPr sz="1300" b="0">
+                <a:solidFill>
+                  <a:srgbClr val="FFFFFF"/>
+                </a:solidFill>
+                <a:latin typeface="Arial"/>
+              </a:defRPr>
+            </a:pPr>
+            <a:r>
+              <a:t>✓ Cơ sở dữ liệu SQLite thiết kế tối ưu, dọn dẹp dữ liệu rác tự động bằng CASCADE.</a:t>
+            </a:r>
+          </a:p>
+          <a:p>
+            <a:pPr>
+              <a:spcAft>
+                <a:spcPts val="800"/>
+              </a:spcAft>
+              <a:defRPr sz="1300" b="0">
+                <a:solidFill>
+                  <a:srgbClr val="FFFFFF"/>
+                </a:solidFill>
+                <a:latin typeface="Arial"/>
+              </a:defRPr>
+            </a:pPr>
+            <a:r>
+              <a:t>✓ Tối ưu hóa hiệu năng tính toán dinh dưỡng, giảm tối đa truy cập đĩa cứng.</a:t>
+            </a:r>
+          </a:p>
+        </p:txBody>
+      </p:sp>
+      <p:sp>
+        <p:nvSpPr>
+          <p:cNvPr id="5" name="Rounded Rectangle 4"/>
+          <p:cNvSpPr/>
+          <p:nvPr/>
+        </p:nvSpPr>
+        <p:spPr>
+          <a:xfrm>
+            <a:off x="6382512" y="1645920"/>
+            <a:ext cx="5120640" cy="4114800"/>
+          </a:xfrm>
+          <a:prstGeom prst="roundRect">
+            <a:avLst/>
+          </a:prstGeom>
+          <a:solidFill>
+            <a:srgbClr val="FFFFFF"/>
+          </a:solidFill>
+          <a:ln>
+            <a:solidFill>
+              <a:srgbClr val="D2D7DF"/>
+            </a:solidFill>
+          </a:ln>
+        </p:spPr>
+        <p:style>
+          <a:lnRef idx="1">
+            <a:schemeClr val="accent1"/>
+          </a:lnRef>
+          <a:fillRef idx="3">
+            <a:schemeClr val="accent1"/>
+          </a:fillRef>
+          <a:effectRef idx="2">
+            <a:schemeClr val="accent1"/>
+          </a:effectRef>
+          <a:fontRef idx="minor">
+            <a:schemeClr val="lt1"/>
+          </a:fontRef>
+        </p:style>
+        <p:txBody>
+          <a:bodyPr rtlCol="0" anchor="ctr" wrap="square" lIns="274320" rIns="274320" tIns="274320"/>
+          <a:lstStyle/>
+          <a:p>
+            <a:pPr algn="ctr">
+              <a:spcAft>
+                <a:spcPts val="1500"/>
+              </a:spcAft>
+              <a:defRPr sz="1800" b="1">
+                <a:solidFill>
+                  <a:srgbClr val="FF6B35"/>
+                </a:solidFill>
+                <a:latin typeface="Arial"/>
+              </a:defRPr>
+            </a:pPr>
+            <a:r>
+              <a:t>KẾ HOẠCH PHÁT TRIỂN</a:t>
+            </a:r>
+          </a:p>
+          <a:p>
+            <a:pPr>
+              <a:spcAft>
+                <a:spcPts val="800"/>
+              </a:spcAft>
+              <a:defRPr sz="1300" b="0">
+                <a:solidFill>
+                  <a:srgbClr val="2B2D42"/>
+                </a:solidFill>
+                <a:latin typeface="Arial"/>
+              </a:defRPr>
+            </a:pPr>
+            <a:r>
+              <a:t>• Nâng cao bảo mật: Tích hợp mã hóa mật khẩu tài khoản người dùng bằng BCrypt.</a:t>
+            </a:r>
+          </a:p>
+          <a:p>
+            <a:pPr>
+              <a:spcAft>
+                <a:spcPts val="800"/>
+              </a:spcAft>
+              <a:defRPr sz="1300" b="0">
+                <a:solidFill>
+                  <a:srgbClr val="2B2D42"/>
+                </a:solidFill>
+                <a:latin typeface="Arial"/>
+              </a:defRPr>
+            </a:pPr>
+            <a:r>
+              <a:t>• Đồng bộ Cloud: Chuyển đổi CSDL offline SQLite lên máy chủ trực tuyến.</a:t>
+            </a:r>
+          </a:p>
+          <a:p>
+            <a:pPr>
+              <a:spcAft>
+                <a:spcPts val="800"/>
+              </a:spcAft>
+              <a:defRPr sz="1300" b="0">
+                <a:solidFill>
+                  <a:srgbClr val="2B2D42"/>
+                </a:solidFill>
+                <a:latin typeface="Arial"/>
+              </a:defRPr>
+            </a:pPr>
+            <a:r>
+              <a:t>• Tính năng AI: Tự động đề xuất thực đơn thông minh dựa trên lượng calo tiêu thụ.</a:t>
             </a:r>
           </a:p>
         </p:txBody>
@@ -4247,7 +4691,7 @@
     <p:bg>
       <p:bgPr>
         <a:solidFill>
-          <a:srgbClr val="FAFAFA"/>
+          <a:srgbClr val="F5F7FA"/>
         </a:solidFill>
         <a:effectLst/>
       </p:bgPr>
@@ -4267,7 +4711,7 @@
         </p:nvSpPr>
         <p:spPr>
           <a:xfrm>
-            <a:off x="685800" y="457200"/>
+            <a:off x="685800" y="365760"/>
             <a:ext cx="10820095" cy="731520"/>
           </a:xfrm>
           <a:prstGeom prst="rect">
@@ -4282,7 +4726,7 @@
           <a:lstStyle/>
           <a:p>
             <a:pPr>
-              <a:defRPr sz="2600" b="1">
+              <a:defRPr sz="2400" b="1">
                 <a:solidFill>
                   <a:srgbClr val="2B2D42"/>
                 </a:solidFill>
@@ -4290,7 +4734,7 @@
               </a:defRPr>
             </a:pPr>
             <a:r>
-              <a:t>TỔNG QUAN &amp; NHU CẦU THỰC TẾ</a:t>
+              <a:t>MỤC TIÊU ĐỀ TÀI &amp; GIẢI PHÁP</a:t>
             </a:r>
           </a:p>
         </p:txBody>
@@ -4303,8 +4747,8 @@
         </p:nvSpPr>
         <p:spPr>
           <a:xfrm>
-            <a:off x="685800" y="1097280"/>
-            <a:ext cx="1097280" cy="45720"/>
+            <a:off x="685800" y="1051560"/>
+            <a:ext cx="1097280" cy="54864"/>
           </a:xfrm>
           <a:prstGeom prst="rect">
             <a:avLst/>
@@ -4313,9 +4757,7 @@
             <a:srgbClr val="FF6B35"/>
           </a:solidFill>
           <a:ln>
-            <a:solidFill>
-              <a:srgbClr val="FF6B35"/>
-            </a:solidFill>
+            <a:noFill/>
           </a:ln>
         </p:spPr>
         <p:style>
@@ -4342,161 +4784,23 @@
       </p:sp>
       <p:sp>
         <p:nvSpPr>
-          <p:cNvPr id="4" name="TextBox 3"/>
-          <p:cNvSpPr txBox="1"/>
-          <p:nvPr/>
-        </p:nvSpPr>
-        <p:spPr>
-          <a:xfrm>
-            <a:off x="685800" y="1645920"/>
-            <a:ext cx="6858000" cy="4389120"/>
-          </a:xfrm>
-          <a:prstGeom prst="rect">
-            <a:avLst/>
-          </a:prstGeom>
-          <a:noFill/>
-        </p:spPr>
-        <p:txBody>
-          <a:bodyPr wrap="square">
-            <a:spAutoFit/>
-          </a:bodyPr>
-          <a:lstStyle/>
-          <a:p>
-            <a:pPr>
-              <a:spcAft>
-                <a:spcPts val="1000"/>
-              </a:spcAft>
-              <a:defRPr sz="1800" b="1">
-                <a:solidFill>
-                  <a:srgbClr val="FF6B35"/>
-                </a:solidFill>
-                <a:latin typeface="Arial"/>
-              </a:defRPr>
-            </a:pPr>
-            <a:r>
-              <a:t>• Vấn đề thực tế của người dùng:</a:t>
-            </a:r>
-          </a:p>
-          <a:p>
-            <a:pPr>
-              <a:spcAft>
-                <a:spcPts val="800"/>
-              </a:spcAft>
-              <a:defRPr sz="1500" b="0">
-                <a:solidFill>
-                  <a:srgbClr val="2B2D42"/>
-                </a:solidFill>
-                <a:latin typeface="Arial"/>
-              </a:defRPr>
-            </a:pPr>
-            <a:r>
-              <a:t>   - Khó khăn khi lên thực đơn dinh dưỡng hàng ngày hợp lý.</a:t>
-            </a:r>
-          </a:p>
-          <a:p>
-            <a:pPr>
-              <a:spcAft>
-                <a:spcPts val="800"/>
-              </a:spcAft>
-              <a:defRPr sz="1500" b="0">
-                <a:solidFill>
-                  <a:srgbClr val="2B2D42"/>
-                </a:solidFill>
-                <a:latin typeface="Arial"/>
-              </a:defRPr>
-            </a:pPr>
-            <a:r>
-              <a:t>   - Thất lạc công thức, không rõ lượng Calo và thời gian nấu.</a:t>
-            </a:r>
-          </a:p>
-          <a:p>
-            <a:pPr>
-              <a:spcAft>
-                <a:spcPts val="1500"/>
-              </a:spcAft>
-              <a:defRPr sz="1500" b="0">
-                <a:solidFill>
-                  <a:srgbClr val="2B2D42"/>
-                </a:solidFill>
-                <a:latin typeface="Arial"/>
-              </a:defRPr>
-            </a:pPr>
-            <a:r>
-              <a:t>   - Mua sắm nguyên liệu đi chợ rời rạc, dễ quên trước quên sau.</a:t>
-            </a:r>
-          </a:p>
-          <a:p>
-            <a:pPr>
-              <a:spcAft>
-                <a:spcPts val="1000"/>
-              </a:spcAft>
-              <a:defRPr sz="1800" b="1">
-                <a:solidFill>
-                  <a:srgbClr val="FF6B35"/>
-                </a:solidFill>
-                <a:latin typeface="Arial"/>
-              </a:defRPr>
-            </a:pPr>
-            <a:r>
-              <a:t>• Giải pháp khép kín của ứng dụng CookBook:</a:t>
-            </a:r>
-          </a:p>
-          <a:p>
-            <a:pPr>
-              <a:spcAft>
-                <a:spcPts val="800"/>
-              </a:spcAft>
-              <a:defRPr sz="1500" b="0">
-                <a:solidFill>
-                  <a:srgbClr val="2B2D42"/>
-                </a:solidFill>
-                <a:latin typeface="Arial"/>
-              </a:defRPr>
-            </a:pPr>
-            <a:r>
-              <a:t>   - Tra cứu và lưu trữ công thức nấu ăn chi tiết theo từng bước.</a:t>
-            </a:r>
-          </a:p>
-          <a:p>
-            <a:pPr>
-              <a:spcAft>
-                <a:spcPts val="800"/>
-              </a:spcAft>
-              <a:defRPr sz="1500" b="0">
-                <a:solidFill>
-                  <a:srgbClr val="2B2D42"/>
-                </a:solidFill>
-                <a:latin typeface="Arial"/>
-              </a:defRPr>
-            </a:pPr>
-            <a:r>
-              <a:t>   - Tự động tách nguyên liệu từ món ăn chuyển sang giỏ đi chợ.</a:t>
-            </a:r>
-          </a:p>
-        </p:txBody>
-      </p:sp>
-      <p:sp>
-        <p:nvSpPr>
-          <p:cNvPr id="5" name="Rounded Rectangle 4"/>
+          <p:cNvPr id="4" name="Rounded Rectangle 3"/>
           <p:cNvSpPr/>
           <p:nvPr/>
         </p:nvSpPr>
         <p:spPr>
           <a:xfrm>
-            <a:off x="8686800" y="1645920"/>
-            <a:ext cx="2194560" cy="4389120"/>
+            <a:off x="685800" y="1463040"/>
+            <a:ext cx="3474720" cy="4572000"/>
           </a:xfrm>
           <a:prstGeom prst="roundRect">
             <a:avLst/>
           </a:prstGeom>
           <a:solidFill>
-            <a:srgbClr val="F0F0F3"/>
+            <a:srgbClr val="2B2D42"/>
           </a:solidFill>
-          <a:ln w="19050">
-            <a:solidFill>
-              <a:srgbClr val="B4B4B9"/>
-            </a:solidFill>
-            <a:prstDash val="sysDash"/>
+          <a:ln>
+            <a:noFill/>
           </a:ln>
         </p:spPr>
         <p:style>
@@ -4514,6 +4818,262 @@
           </a:fontRef>
         </p:style>
         <p:txBody>
+          <a:bodyPr rtlCol="0" anchor="ctr" wrap="square" lIns="228600" rIns="228600" tIns="228600"/>
+          <a:lstStyle/>
+          <a:p>
+            <a:pPr algn="ctr">
+              <a:spcAft>
+                <a:spcPts val="1500"/>
+              </a:spcAft>
+              <a:defRPr sz="1800" b="1">
+                <a:solidFill>
+                  <a:srgbClr val="FF6B35"/>
+                </a:solidFill>
+                <a:latin typeface="Arial"/>
+              </a:defRPr>
+            </a:pPr>
+            <a:r>
+              <a:t>KHÓ KHĂN THỰC TẾ</a:t>
+            </a:r>
+          </a:p>
+          <a:p>
+            <a:pPr>
+              <a:spcAft>
+                <a:spcPts val="1000"/>
+              </a:spcAft>
+              <a:defRPr sz="1300" b="0">
+                <a:solidFill>
+                  <a:srgbClr val="FFFFFF"/>
+                </a:solidFill>
+                <a:latin typeface="Arial"/>
+              </a:defRPr>
+            </a:pPr>
+            <a:r>
+              <a:t>- Người nội trợ khó tìm kiếm món ăn theo lượng Calo và độ khó nấu.</a:t>
+            </a:r>
+          </a:p>
+          <a:p>
+            <a:pPr>
+              <a:spcAft>
+                <a:spcPts val="1000"/>
+              </a:spcAft>
+              <a:defRPr sz="1300" b="0">
+                <a:solidFill>
+                  <a:srgbClr val="FFFFFF"/>
+                </a:solidFill>
+                <a:latin typeface="Arial"/>
+              </a:defRPr>
+            </a:pPr>
+            <a:r>
+              <a:t>- Thất lạc công thức chi tiết.</a:t>
+            </a:r>
+          </a:p>
+          <a:p>
+            <a:pPr>
+              <a:spcAft>
+                <a:spcPts val="1000"/>
+              </a:spcAft>
+              <a:defRPr sz="1300" b="0">
+                <a:solidFill>
+                  <a:srgbClr val="FFFFFF"/>
+                </a:solidFill>
+                <a:latin typeface="Arial"/>
+              </a:defRPr>
+            </a:pPr>
+            <a:r>
+              <a:t>- Đi siêu thị chuẩn bị nguyên liệu nấu nướng thường dễ quên đồ.</a:t>
+            </a:r>
+          </a:p>
+        </p:txBody>
+      </p:sp>
+      <p:sp>
+        <p:nvSpPr>
+          <p:cNvPr id="5" name="Rounded Rectangle 4"/>
+          <p:cNvSpPr/>
+          <p:nvPr/>
+        </p:nvSpPr>
+        <p:spPr>
+          <a:xfrm>
+            <a:off x="4389120" y="1463040"/>
+            <a:ext cx="3474720" cy="4572000"/>
+          </a:xfrm>
+          <a:prstGeom prst="roundRect">
+            <a:avLst/>
+          </a:prstGeom>
+          <a:solidFill>
+            <a:srgbClr val="FFFFFF"/>
+          </a:solidFill>
+          <a:ln w="19050">
+            <a:solidFill>
+              <a:srgbClr val="FF6B35"/>
+            </a:solidFill>
+          </a:ln>
+        </p:spPr>
+        <p:style>
+          <a:lnRef idx="1">
+            <a:schemeClr val="accent1"/>
+          </a:lnRef>
+          <a:fillRef idx="3">
+            <a:schemeClr val="accent1"/>
+          </a:fillRef>
+          <a:effectRef idx="2">
+            <a:schemeClr val="accent1"/>
+          </a:effectRef>
+          <a:fontRef idx="minor">
+            <a:schemeClr val="lt1"/>
+          </a:fontRef>
+        </p:style>
+        <p:txBody>
+          <a:bodyPr rtlCol="0" anchor="ctr" wrap="square" lIns="228600" rIns="228600" tIns="228600"/>
+          <a:lstStyle/>
+          <a:p>
+            <a:pPr algn="ctr">
+              <a:spcAft>
+                <a:spcPts val="1500"/>
+              </a:spcAft>
+              <a:defRPr sz="1800" b="1">
+                <a:solidFill>
+                  <a:srgbClr val="FF6B35"/>
+                </a:solidFill>
+                <a:latin typeface="Arial"/>
+              </a:defRPr>
+            </a:pPr>
+            <a:r>
+              <a:t>GIẢI PHÁP COOKBOOK</a:t>
+            </a:r>
+          </a:p>
+          <a:p>
+            <a:pPr>
+              <a:spcAft>
+                <a:spcPts val="1000"/>
+              </a:spcAft>
+              <a:defRPr sz="1300" b="0">
+                <a:solidFill>
+                  <a:srgbClr val="2B2D42"/>
+                </a:solidFill>
+                <a:latin typeface="Arial"/>
+              </a:defRPr>
+            </a:pPr>
+            <a:r>
+              <a:t>- Tích hợp đa dạng công thức nấu ăn, chi tiết dinh dưỡng.</a:t>
+            </a:r>
+          </a:p>
+          <a:p>
+            <a:pPr>
+              <a:spcAft>
+                <a:spcPts val="1000"/>
+              </a:spcAft>
+              <a:defRPr sz="1300" b="0">
+                <a:solidFill>
+                  <a:srgbClr val="2B2D42"/>
+                </a:solidFill>
+                <a:latin typeface="Arial"/>
+              </a:defRPr>
+            </a:pPr>
+            <a:r>
+              <a:t>- Tự động đồng bộ nguyên liệu món ăn vào danh sách đi chợ.</a:t>
+            </a:r>
+          </a:p>
+          <a:p>
+            <a:pPr>
+              <a:spcAft>
+                <a:spcPts val="1000"/>
+              </a:spcAft>
+              <a:defRPr sz="1300" b="0">
+                <a:solidFill>
+                  <a:srgbClr val="2B2D42"/>
+                </a:solidFill>
+                <a:latin typeface="Arial"/>
+              </a:defRPr>
+            </a:pPr>
+            <a:r>
+              <a:t>- Thống kê sức khỏe &amp; cá nhân hóa lịch sử nấu nướng.</a:t>
+            </a:r>
+          </a:p>
+        </p:txBody>
+      </p:sp>
+      <p:sp>
+        <p:nvSpPr>
+          <p:cNvPr id="6" name="Rounded Rectangle 5"/>
+          <p:cNvSpPr/>
+          <p:nvPr/>
+        </p:nvSpPr>
+        <p:spPr>
+          <a:xfrm>
+            <a:off x="8686800" y="1463040"/>
+            <a:ext cx="2286000" cy="4572000"/>
+          </a:xfrm>
+          <a:prstGeom prst="roundRect">
+            <a:avLst/>
+          </a:prstGeom>
+          <a:solidFill>
+            <a:srgbClr val="2B2D42"/>
+          </a:solidFill>
+          <a:ln>
+            <a:noFill/>
+          </a:ln>
+        </p:spPr>
+        <p:style>
+          <a:lnRef idx="1">
+            <a:schemeClr val="accent1"/>
+          </a:lnRef>
+          <a:fillRef idx="3">
+            <a:schemeClr val="accent1"/>
+          </a:fillRef>
+          <a:effectRef idx="2">
+            <a:schemeClr val="accent1"/>
+          </a:effectRef>
+          <a:fontRef idx="minor">
+            <a:schemeClr val="lt1"/>
+          </a:fontRef>
+        </p:style>
+        <p:txBody>
+          <a:bodyPr rtlCol="0" anchor="ctr"/>
+          <a:lstStyle/>
+          <a:p>
+            <a:pPr algn="ctr"/>
+          </a:p>
+        </p:txBody>
+      </p:sp>
+      <p:sp>
+        <p:nvSpPr>
+          <p:cNvPr id="7" name="Rectangle 6"/>
+          <p:cNvSpPr/>
+          <p:nvPr/>
+        </p:nvSpPr>
+        <p:spPr>
+          <a:xfrm>
+            <a:off x="8796528" y="1691640"/>
+            <a:ext cx="2066544" cy="4114800"/>
+          </a:xfrm>
+          <a:prstGeom prst="rect">
+            <a:avLst/>
+          </a:prstGeom>
+          <a:solidFill>
+            <a:srgbClr val="F8F9FC"/>
+          </a:solidFill>
+          <a:ln w="19050">
+            <a:solidFill>
+              <a:srgbClr val="D2D7DF"/>
+            </a:solidFill>
+            <a:prstDash val="sysDash"/>
+          </a:ln>
+        </p:spPr>
+        <p:style>
+          <a:lnRef idx="1">
+            <a:schemeClr val="accent1"/>
+          </a:lnRef>
+          <a:fillRef idx="3">
+            <a:schemeClr val="accent1"/>
+          </a:fillRef>
+          <a:effectRef idx="2">
+            <a:schemeClr val="accent1"/>
+          </a:effectRef>
+          <a:fontRef idx="minor">
+            <a:schemeClr val="lt1"/>
+          </a:fontRef>
+        </p:style>
+        <p:txBody>
           <a:bodyPr rtlCol="0" anchor="ctr" wrap="square" tIns="91440" bIns="91440"/>
           <a:lstStyle/>
           <a:p>
@@ -4529,17 +5089,57 @@
             <a:br/>
             <a:br/>
             <a:br/>
-            <a:r>
-              <a:t>[ Kéo ảnh ]</a:t>
-            </a:r>
             <a:br/>
             <a:r>
-              <a:t>Màn hình Khởi động</a:t>
+              <a:t>[ Kéo ảnh chụp ]</a:t>
             </a:r>
             <a:br/>
             <a:r>
-              <a:t>(SplashActivity)</a:t>
-            </a:r>
+              <a:t>Màn Splash (Chào)</a:t>
+            </a:r>
+          </a:p>
+        </p:txBody>
+      </p:sp>
+      <p:sp>
+        <p:nvSpPr>
+          <p:cNvPr id="8" name="Rounded Rectangle 7"/>
+          <p:cNvSpPr/>
+          <p:nvPr/>
+        </p:nvSpPr>
+        <p:spPr>
+          <a:xfrm>
+            <a:off x="9464040" y="1527048"/>
+            <a:ext cx="731520" cy="128016"/>
+          </a:xfrm>
+          <a:prstGeom prst="roundRect">
+            <a:avLst/>
+          </a:prstGeom>
+          <a:solidFill>
+            <a:srgbClr val="0F0F0F"/>
+          </a:solidFill>
+          <a:ln>
+            <a:noFill/>
+          </a:ln>
+        </p:spPr>
+        <p:style>
+          <a:lnRef idx="1">
+            <a:schemeClr val="accent1"/>
+          </a:lnRef>
+          <a:fillRef idx="3">
+            <a:schemeClr val="accent1"/>
+          </a:fillRef>
+          <a:effectRef idx="2">
+            <a:schemeClr val="accent1"/>
+          </a:effectRef>
+          <a:fontRef idx="minor">
+            <a:schemeClr val="lt1"/>
+          </a:fontRef>
+        </p:style>
+        <p:txBody>
+          <a:bodyPr rtlCol="0" anchor="ctr"/>
+          <a:lstStyle/>
+          <a:p>
+            <a:pPr algn="ctr"/>
           </a:p>
         </p:txBody>
       </p:sp>
@@ -4557,7 +5157,7 @@
     <p:bg>
       <p:bgPr>
         <a:solidFill>
-          <a:srgbClr val="FAFAFA"/>
+          <a:srgbClr val="F5F7FA"/>
         </a:solidFill>
         <a:effectLst/>
       </p:bgPr>
@@ -4577,7 +5177,7 @@
         </p:nvSpPr>
         <p:spPr>
           <a:xfrm>
-            <a:off x="685800" y="457200"/>
+            <a:off x="685800" y="365760"/>
             <a:ext cx="10820095" cy="731520"/>
           </a:xfrm>
           <a:prstGeom prst="rect">
@@ -4592,7 +5192,7 @@
           <a:lstStyle/>
           <a:p>
             <a:pPr>
-              <a:defRPr sz="2600" b="1">
+              <a:defRPr sz="2400" b="1">
                 <a:solidFill>
                   <a:srgbClr val="2B2D42"/>
                 </a:solidFill>
@@ -4600,7 +5200,7 @@
               </a:defRPr>
             </a:pPr>
             <a:r>
-              <a:t>KIẾN TRÚC VÀ CÔNG NGHỆ SỬ DỤNG</a:t>
+              <a:t>CÁC CHỨC NĂNG CHÍNH CÓ TRONG APP</a:t>
             </a:r>
           </a:p>
         </p:txBody>
@@ -4613,8 +5213,8 @@
         </p:nvSpPr>
         <p:spPr>
           <a:xfrm>
-            <a:off x="685800" y="1097280"/>
-            <a:ext cx="1097280" cy="45720"/>
+            <a:off x="685800" y="1051560"/>
+            <a:ext cx="1097280" cy="54864"/>
           </a:xfrm>
           <a:prstGeom prst="rect">
             <a:avLst/>
@@ -4623,9 +5223,7 @@
             <a:srgbClr val="FF6B35"/>
           </a:solidFill>
           <a:ln>
-            <a:solidFill>
-              <a:srgbClr val="FF6B35"/>
-            </a:solidFill>
+            <a:noFill/>
           </a:ln>
         </p:spPr>
         <p:style>
@@ -4652,24 +5250,24 @@
       </p:sp>
       <p:sp>
         <p:nvSpPr>
-          <p:cNvPr id="4" name="Rectangle 3"/>
+          <p:cNvPr id="4" name="Rounded Rectangle 3"/>
           <p:cNvSpPr/>
           <p:nvPr/>
         </p:nvSpPr>
         <p:spPr>
           <a:xfrm>
-            <a:off x="685800" y="1828800"/>
-            <a:ext cx="2468880" cy="3474720"/>
-          </a:xfrm>
-          <a:prstGeom prst="rect">
+            <a:off x="685800" y="1554480"/>
+            <a:ext cx="2468880" cy="4206240"/>
+          </a:xfrm>
+          <a:prstGeom prst="roundRect">
             <a:avLst/>
           </a:prstGeom>
           <a:solidFill>
-            <a:srgbClr val="2B2D42"/>
+            <a:srgbClr val="FFFFFF"/>
           </a:solidFill>
           <a:ln>
             <a:solidFill>
-              <a:srgbClr val="2B2D42"/>
+              <a:srgbClr val="D2D7DF"/>
             </a:solidFill>
           </a:ln>
         </p:spPr>
@@ -4693,9 +5291,9 @@
           <a:p>
             <a:pPr algn="ctr">
               <a:spcAft>
-                <a:spcPts val="200"/>
+                <a:spcPts val="500"/>
               </a:spcAft>
-              <a:defRPr sz="1800" b="1">
+              <a:defRPr sz="2600" b="1">
                 <a:solidFill>
                   <a:srgbClr val="FF6B35"/>
                 </a:solidFill>
@@ -4703,23 +5301,23 @@
               </a:defRPr>
             </a:pPr>
             <a:r>
-              <a:t>JAVA &amp; XML</a:t>
+              <a:t>01</a:t>
             </a:r>
           </a:p>
           <a:p>
             <a:pPr>
               <a:spcAft>
-                <a:spcPts val="1500"/>
+                <a:spcPts val="1000"/>
               </a:spcAft>
-              <a:defRPr sz="1100" b="1">
-                <a:solidFill>
-                  <a:srgbClr val="8C919E"/>
-                </a:solidFill>
-                <a:latin typeface="Arial"/>
-              </a:defRPr>
-            </a:pPr>
-            <a:r>
-              <a:t>Android Native</a:t>
+              <a:defRPr sz="1500" b="1">
+                <a:solidFill>
+                  <a:srgbClr val="2B2D42"/>
+                </a:solidFill>
+                <a:latin typeface="Arial"/>
+              </a:defRPr>
+            </a:pPr>
+            <a:r>
+              <a:t>Đăng ký &amp; Đăng nhập</a:t>
             </a:r>
           </a:p>
           <a:p>
@@ -4727,39 +5325,39 @@
               <a:spcAft>
                 <a:spcPts val="800"/>
               </a:spcAft>
-              <a:defRPr sz="1300" b="0">
-                <a:solidFill>
-                  <a:srgbClr val="FFFFFF"/>
-                </a:solidFill>
-                <a:latin typeface="Arial"/>
-              </a:defRPr>
-            </a:pPr>
-            <a:r>
-              <a:t>Sử dụng Single Activity (MainActivity, AuthActivity) kết hợp nhiều Fragment để giao diện phản hồi nhanh, mượt.</a:t>
-            </a:r>
-          </a:p>
-        </p:txBody>
-      </p:sp>
-      <p:sp>
-        <p:nvSpPr>
-          <p:cNvPr id="5" name="Rectangle 4"/>
+              <a:defRPr sz="1200" b="0">
+                <a:solidFill>
+                  <a:srgbClr val="8C919E"/>
+                </a:solidFill>
+                <a:latin typeface="Arial"/>
+              </a:defRPr>
+            </a:pPr>
+            <a:r>
+              <a:t>Bảo mật tài khoản, xác thực email và lưu giữ phiên đăng nhập qua SharedPreferences.</a:t>
+            </a:r>
+          </a:p>
+        </p:txBody>
+      </p:sp>
+      <p:sp>
+        <p:nvSpPr>
+          <p:cNvPr id="5" name="Rounded Rectangle 4"/>
           <p:cNvSpPr/>
           <p:nvPr/>
         </p:nvSpPr>
         <p:spPr>
           <a:xfrm>
-            <a:off x="3429000" y="1828800"/>
-            <a:ext cx="2468880" cy="3474720"/>
-          </a:xfrm>
-          <a:prstGeom prst="rect">
+            <a:off x="3429000" y="1554480"/>
+            <a:ext cx="2468880" cy="4206240"/>
+          </a:xfrm>
+          <a:prstGeom prst="roundRect">
             <a:avLst/>
           </a:prstGeom>
           <a:solidFill>
-            <a:srgbClr val="2B2D42"/>
+            <a:srgbClr val="FFFFFF"/>
           </a:solidFill>
           <a:ln>
             <a:solidFill>
-              <a:srgbClr val="2B2D42"/>
+              <a:srgbClr val="D2D7DF"/>
             </a:solidFill>
           </a:ln>
         </p:spPr>
@@ -4783,9 +5381,9 @@
           <a:p>
             <a:pPr algn="ctr">
               <a:spcAft>
-                <a:spcPts val="200"/>
+                <a:spcPts val="500"/>
               </a:spcAft>
-              <a:defRPr sz="1800" b="1">
+              <a:defRPr sz="2600" b="1">
                 <a:solidFill>
                   <a:srgbClr val="FF6B35"/>
                 </a:solidFill>
@@ -4793,23 +5391,23 @@
               </a:defRPr>
             </a:pPr>
             <a:r>
-              <a:t>SQLITE</a:t>
+              <a:t>02</a:t>
             </a:r>
           </a:p>
           <a:p>
             <a:pPr>
               <a:spcAft>
-                <a:spcPts val="1500"/>
+                <a:spcPts val="1000"/>
               </a:spcAft>
-              <a:defRPr sz="1100" b="1">
-                <a:solidFill>
-                  <a:srgbClr val="8C919E"/>
-                </a:solidFill>
-                <a:latin typeface="Arial"/>
-              </a:defRPr>
-            </a:pPr>
-            <a:r>
-              <a:t>DatabaseHelper</a:t>
+              <a:defRPr sz="1500" b="1">
+                <a:solidFill>
+                  <a:srgbClr val="2B2D42"/>
+                </a:solidFill>
+                <a:latin typeface="Arial"/>
+              </a:defRPr>
+            </a:pPr>
+            <a:r>
+              <a:t>Tìm kiếm &amp; Chi tiết</a:t>
             </a:r>
           </a:p>
           <a:p>
@@ -4817,39 +5415,39 @@
               <a:spcAft>
                 <a:spcPts val="800"/>
               </a:spcAft>
-              <a:defRPr sz="1300" b="0">
-                <a:solidFill>
-                  <a:srgbClr val="FFFFFF"/>
-                </a:solidFill>
-                <a:latin typeface="Arial"/>
-              </a:defRPr>
-            </a:pPr>
-            <a:r>
-              <a:t>Cơ sở dữ liệu cục bộ, quản lý các bảng quan hệ. Bật ràng buộc khóa ngoại để CASCADE dữ liệu tự động dọn rác.</a:t>
-            </a:r>
-          </a:p>
-        </p:txBody>
-      </p:sp>
-      <p:sp>
-        <p:nvSpPr>
-          <p:cNvPr id="6" name="Rectangle 5"/>
+              <a:defRPr sz="1200" b="0">
+                <a:solidFill>
+                  <a:srgbClr val="8C919E"/>
+                </a:solidFill>
+                <a:latin typeface="Arial"/>
+              </a:defRPr>
+            </a:pPr>
+            <a:r>
+              <a:t>Tìm món ăn thông minh không dấu, xem nguyên liệu, định lượng và hướng dẫn từng bước nấu.</a:t>
+            </a:r>
+          </a:p>
+        </p:txBody>
+      </p:sp>
+      <p:sp>
+        <p:nvSpPr>
+          <p:cNvPr id="6" name="Rounded Rectangle 5"/>
           <p:cNvSpPr/>
           <p:nvPr/>
         </p:nvSpPr>
         <p:spPr>
           <a:xfrm>
-            <a:off x="6172200" y="1828800"/>
-            <a:ext cx="2468880" cy="3474720"/>
-          </a:xfrm>
-          <a:prstGeom prst="rect">
+            <a:off x="6172200" y="1554480"/>
+            <a:ext cx="2468880" cy="4206240"/>
+          </a:xfrm>
+          <a:prstGeom prst="roundRect">
             <a:avLst/>
           </a:prstGeom>
           <a:solidFill>
-            <a:srgbClr val="2B2D42"/>
+            <a:srgbClr val="FFFFFF"/>
           </a:solidFill>
           <a:ln>
             <a:solidFill>
-              <a:srgbClr val="2B2D42"/>
+              <a:srgbClr val="D2D7DF"/>
             </a:solidFill>
           </a:ln>
         </p:spPr>
@@ -4873,9 +5471,9 @@
           <a:p>
             <a:pPr algn="ctr">
               <a:spcAft>
-                <a:spcPts val="200"/>
+                <a:spcPts val="500"/>
               </a:spcAft>
-              <a:defRPr sz="1800" b="1">
+              <a:defRPr sz="2600" b="1">
                 <a:solidFill>
                   <a:srgbClr val="FF6B35"/>
                 </a:solidFill>
@@ -4883,23 +5481,23 @@
               </a:defRPr>
             </a:pPr>
             <a:r>
-              <a:t>SHAREDPREF</a:t>
+              <a:t>03</a:t>
             </a:r>
           </a:p>
           <a:p>
             <a:pPr>
               <a:spcAft>
-                <a:spcPts val="1500"/>
+                <a:spcPts val="1000"/>
               </a:spcAft>
-              <a:defRPr sz="1100" b="1">
-                <a:solidFill>
-                  <a:srgbClr val="8C919E"/>
-                </a:solidFill>
-                <a:latin typeface="Arial"/>
-              </a:defRPr>
-            </a:pPr>
-            <a:r>
-              <a:t>Session System</a:t>
+              <a:defRPr sz="1500" b="1">
+                <a:solidFill>
+                  <a:srgbClr val="2B2D42"/>
+                </a:solidFill>
+                <a:latin typeface="Arial"/>
+              </a:defRPr>
+            </a:pPr>
+            <a:r>
+              <a:t>Yêu thích &amp; Thống kê</a:t>
             </a:r>
           </a:p>
           <a:p>
@@ -4907,39 +5505,39 @@
               <a:spcAft>
                 <a:spcPts val="800"/>
               </a:spcAft>
-              <a:defRPr sz="1300" b="0">
-                <a:solidFill>
-                  <a:srgbClr val="FFFFFF"/>
-                </a:solidFill>
-                <a:latin typeface="Arial"/>
-              </a:defRPr>
-            </a:pPr>
-            <a:r>
-              <a:t>Lưu trữ userId cục bộ ở chế độ bảo mật MODE_PRIVATE nhằm ghi nhớ trạng thái người dùng đã đăng nhập.</a:t>
-            </a:r>
-          </a:p>
-        </p:txBody>
-      </p:sp>
-      <p:sp>
-        <p:nvSpPr>
-          <p:cNvPr id="7" name="Rectangle 6"/>
+              <a:defRPr sz="1200" b="0">
+                <a:solidFill>
+                  <a:srgbClr val="8C919E"/>
+                </a:solidFill>
+                <a:latin typeface="Arial"/>
+              </a:defRPr>
+            </a:pPr>
+            <a:r>
+              <a:t>Lưu trữ món ăn yêu thích, bộ lọc nâng cao và thẻ thống kê năng lượng Calo trung bình.</a:t>
+            </a:r>
+          </a:p>
+        </p:txBody>
+      </p:sp>
+      <p:sp>
+        <p:nvSpPr>
+          <p:cNvPr id="7" name="Rounded Rectangle 6"/>
           <p:cNvSpPr/>
           <p:nvPr/>
         </p:nvSpPr>
         <p:spPr>
           <a:xfrm>
-            <a:off x="8915400" y="1828800"/>
-            <a:ext cx="2468880" cy="3474720"/>
-          </a:xfrm>
-          <a:prstGeom prst="rect">
+            <a:off x="8915400" y="1554480"/>
+            <a:ext cx="2468880" cy="4206240"/>
+          </a:xfrm>
+          <a:prstGeom prst="roundRect">
             <a:avLst/>
           </a:prstGeom>
           <a:solidFill>
-            <a:srgbClr val="2B2D42"/>
+            <a:srgbClr val="FFFFFF"/>
           </a:solidFill>
           <a:ln>
             <a:solidFill>
-              <a:srgbClr val="2B2D42"/>
+              <a:srgbClr val="D2D7DF"/>
             </a:solidFill>
           </a:ln>
         </p:spPr>
@@ -4963,9 +5561,9 @@
           <a:p>
             <a:pPr algn="ctr">
               <a:spcAft>
-                <a:spcPts val="200"/>
+                <a:spcPts val="500"/>
               </a:spcAft>
-              <a:defRPr sz="1800" b="1">
+              <a:defRPr sz="2600" b="1">
                 <a:solidFill>
                   <a:srgbClr val="FF6B35"/>
                 </a:solidFill>
@@ -4973,23 +5571,23 @@
               </a:defRPr>
             </a:pPr>
             <a:r>
-              <a:t>MATERIAL UI</a:t>
+              <a:t>04</a:t>
             </a:r>
           </a:p>
           <a:p>
             <a:pPr>
               <a:spcAft>
-                <a:spcPts val="1500"/>
+                <a:spcPts val="1000"/>
               </a:spcAft>
-              <a:defRPr sz="1100" b="1">
-                <a:solidFill>
-                  <a:srgbClr val="8C919E"/>
-                </a:solidFill>
-                <a:latin typeface="Arial"/>
-              </a:defRPr>
-            </a:pPr>
-            <a:r>
-              <a:t>Google Design</a:t>
+              <a:defRPr sz="1500" b="1">
+                <a:solidFill>
+                  <a:srgbClr val="2B2D42"/>
+                </a:solidFill>
+                <a:latin typeface="Arial"/>
+              </a:defRPr>
+            </a:pPr>
+            <a:r>
+              <a:t>Đi chợ &amp; Lịch sử</a:t>
             </a:r>
           </a:p>
           <a:p>
@@ -4997,15 +5595,15 @@
               <a:spcAft>
                 <a:spcPts val="800"/>
               </a:spcAft>
-              <a:defRPr sz="1300" b="0">
-                <a:solidFill>
-                  <a:srgbClr val="FFFFFF"/>
-                </a:solidFill>
-                <a:latin typeface="Arial"/>
-              </a:defRPr>
-            </a:pPr>
-            <a:r>
-              <a:t>Sử dụng CardView, BottomNavigationView, Custom Adapters cho RecyclerView lồng nhau, ProgressBar đổi màu.</a:t>
+              <a:defRPr sz="1200" b="0">
+                <a:solidFill>
+                  <a:srgbClr val="8C919E"/>
+                </a:solidFill>
+                <a:latin typeface="Arial"/>
+              </a:defRPr>
+            </a:pPr>
+            <a:r>
+              <a:t>Gom nguyên liệu theo món, cập nhật tiến trình mua sắm, ghi nhận lịch sử món ăn đã nấu.</a:t>
             </a:r>
           </a:p>
         </p:txBody>
@@ -5024,7 +5622,7 @@
     <p:bg>
       <p:bgPr>
         <a:solidFill>
-          <a:srgbClr val="FAFAFA"/>
+          <a:srgbClr val="F5F7FA"/>
         </a:solidFill>
         <a:effectLst/>
       </p:bgPr>
@@ -5044,7 +5642,7 @@
         </p:nvSpPr>
         <p:spPr>
           <a:xfrm>
-            <a:off x="685800" y="457200"/>
+            <a:off x="685800" y="365760"/>
             <a:ext cx="10820095" cy="731520"/>
           </a:xfrm>
           <a:prstGeom prst="rect">
@@ -5059,7 +5657,7 @@
           <a:lstStyle/>
           <a:p>
             <a:pPr>
-              <a:defRPr sz="2600" b="1">
+              <a:defRPr sz="2400" b="1">
                 <a:solidFill>
                   <a:srgbClr val="2B2D42"/>
                 </a:solidFill>
@@ -5067,7 +5665,7 @@
               </a:defRPr>
             </a:pPr>
             <a:r>
-              <a:t>LUỒNG NGHIỆP VỤ TOÀN DIỆN TRÊN APP</a:t>
+              <a:t>CÔNG NGHỆ VÀ KIẾN TRÚC HỆ THỐNG</a:t>
             </a:r>
           </a:p>
         </p:txBody>
@@ -5080,8 +5678,8 @@
         </p:nvSpPr>
         <p:spPr>
           <a:xfrm>
-            <a:off x="685800" y="1097280"/>
-            <a:ext cx="1097280" cy="45720"/>
+            <a:off x="685800" y="1051560"/>
+            <a:ext cx="1097280" cy="54864"/>
           </a:xfrm>
           <a:prstGeom prst="rect">
             <a:avLst/>
@@ -5090,9 +5688,7 @@
             <a:srgbClr val="FF6B35"/>
           </a:solidFill>
           <a:ln>
-            <a:solidFill>
-              <a:srgbClr val="FF6B35"/>
-            </a:solidFill>
+            <a:noFill/>
           </a:ln>
         </p:spPr>
         <p:style>
@@ -5119,25 +5715,23 @@
       </p:sp>
       <p:sp>
         <p:nvSpPr>
-          <p:cNvPr id="4" name="Rounded Rectangle 3"/>
+          <p:cNvPr id="4" name="Rectangle 3"/>
           <p:cNvSpPr/>
           <p:nvPr/>
         </p:nvSpPr>
         <p:spPr>
           <a:xfrm>
             <a:off x="685800" y="2011680"/>
-            <a:ext cx="1600200" cy="3200400"/>
-          </a:xfrm>
-          <a:prstGeom prst="roundRect">
+            <a:ext cx="2468880" cy="3291840"/>
+          </a:xfrm>
+          <a:prstGeom prst="rect">
             <a:avLst/>
           </a:prstGeom>
           <a:solidFill>
-            <a:srgbClr val="FFFFFF"/>
+            <a:srgbClr val="2B2D42"/>
           </a:solidFill>
-          <a:ln w="19050">
-            <a:solidFill>
-              <a:srgbClr val="FF6B35"/>
-            </a:solidFill>
+          <a:ln>
+            <a:noFill/>
           </a:ln>
         </p:spPr>
         <p:style>
@@ -5155,14 +5749,14 @@
           </a:fontRef>
         </p:style>
         <p:txBody>
-          <a:bodyPr rtlCol="0" anchor="ctr" wrap="square" lIns="109728" rIns="109728" tIns="109728"/>
+          <a:bodyPr rtlCol="0" anchor="ctr" wrap="square" lIns="182880" rIns="182880" tIns="182880"/>
           <a:lstStyle/>
           <a:p>
             <a:pPr algn="ctr">
               <a:spcAft>
-                <a:spcPts val="500"/>
+                <a:spcPts val="200"/>
               </a:spcAft>
-              <a:defRPr sz="1200" b="1">
+              <a:defRPr sz="1800" b="1">
                 <a:solidFill>
                   <a:srgbClr val="FF6B35"/>
                 </a:solidFill>
@@ -5170,7 +5764,23 @@
               </a:defRPr>
             </a:pPr>
             <a:r>
-              <a:t>BƯỚC 1</a:t>
+              <a:t>JAVA &amp; ANDROID</a:t>
+            </a:r>
+          </a:p>
+          <a:p>
+            <a:pPr>
+              <a:spcAft>
+                <a:spcPts val="1500"/>
+              </a:spcAft>
+              <a:defRPr sz="1100" b="1">
+                <a:solidFill>
+                  <a:srgbClr val="8C919E"/>
+                </a:solidFill>
+                <a:latin typeface="Arial"/>
+              </a:defRPr>
+            </a:pPr>
+            <a:r>
+              <a:t>Native Development</a:t>
             </a:r>
           </a:p>
           <a:p>
@@ -5178,56 +5788,38 @@
               <a:spcAft>
                 <a:spcPts val="800"/>
               </a:spcAft>
-              <a:defRPr sz="1300" b="1">
-                <a:solidFill>
-                  <a:srgbClr val="2B2D42"/>
-                </a:solidFill>
-                <a:latin typeface="Arial"/>
-              </a:defRPr>
-            </a:pPr>
-            <a:r>
-              <a:t>Khởi động</a:t>
-            </a:r>
-          </a:p>
-          <a:p>
-            <a:pPr>
-              <a:spcAft>
-                <a:spcPts val="500"/>
-              </a:spcAft>
-              <a:defRPr sz="1100" b="0">
-                <a:solidFill>
-                  <a:srgbClr val="8C919E"/>
-                </a:solidFill>
-                <a:latin typeface="Arial"/>
-              </a:defRPr>
-            </a:pPr>
-            <a:r>
-              <a:t>Splash screen hiển thị logo thương hiệu ứng dụng.</a:t>
-            </a:r>
-          </a:p>
-        </p:txBody>
-      </p:sp>
-      <p:sp>
-        <p:nvSpPr>
-          <p:cNvPr id="5" name="Rounded Rectangle 4"/>
+              <a:defRPr sz="1200" b="0">
+                <a:solidFill>
+                  <a:srgbClr val="FFFFFF"/>
+                </a:solidFill>
+                <a:latin typeface="Arial"/>
+              </a:defRPr>
+            </a:pPr>
+            <a:r>
+              <a:t>Ngôn ngữ phát triển cốt lõi. Thiết kế mô hình Single Activity điều hướng Fragment linh hoạt, tối ưu bộ nhớ RAM.</a:t>
+            </a:r>
+          </a:p>
+        </p:txBody>
+      </p:sp>
+      <p:sp>
+        <p:nvSpPr>
+          <p:cNvPr id="5" name="Rectangle 4"/>
           <p:cNvSpPr/>
           <p:nvPr/>
         </p:nvSpPr>
         <p:spPr>
           <a:xfrm>
-            <a:off x="2468880" y="2011680"/>
-            <a:ext cx="1600200" cy="3200400"/>
-          </a:xfrm>
-          <a:prstGeom prst="roundRect">
+            <a:off x="3429000" y="2011680"/>
+            <a:ext cx="2468880" cy="3291840"/>
+          </a:xfrm>
+          <a:prstGeom prst="rect">
             <a:avLst/>
           </a:prstGeom>
           <a:solidFill>
-            <a:srgbClr val="FFFFFF"/>
+            <a:srgbClr val="2B2D42"/>
           </a:solidFill>
-          <a:ln w="19050">
-            <a:solidFill>
-              <a:srgbClr val="FF6B35"/>
-            </a:solidFill>
+          <a:ln>
+            <a:noFill/>
           </a:ln>
         </p:spPr>
         <p:style>
@@ -5245,14 +5837,14 @@
           </a:fontRef>
         </p:style>
         <p:txBody>
-          <a:bodyPr rtlCol="0" anchor="ctr" wrap="square" lIns="109728" rIns="109728" tIns="109728"/>
+          <a:bodyPr rtlCol="0" anchor="ctr" wrap="square" lIns="182880" rIns="182880" tIns="182880"/>
           <a:lstStyle/>
           <a:p>
             <a:pPr algn="ctr">
               <a:spcAft>
-                <a:spcPts val="500"/>
+                <a:spcPts val="200"/>
               </a:spcAft>
-              <a:defRPr sz="1200" b="1">
+              <a:defRPr sz="1800" b="1">
                 <a:solidFill>
                   <a:srgbClr val="FF6B35"/>
                 </a:solidFill>
@@ -5260,7 +5852,23 @@
               </a:defRPr>
             </a:pPr>
             <a:r>
-              <a:t>BƯỚC 2</a:t>
+              <a:t>SQLITE DATABASE</a:t>
+            </a:r>
+          </a:p>
+          <a:p>
+            <a:pPr>
+              <a:spcAft>
+                <a:spcPts val="1500"/>
+              </a:spcAft>
+              <a:defRPr sz="1100" b="1">
+                <a:solidFill>
+                  <a:srgbClr val="8C919E"/>
+                </a:solidFill>
+                <a:latin typeface="Arial"/>
+              </a:defRPr>
+            </a:pPr>
+            <a:r>
+              <a:t>Local Data Engine</a:t>
             </a:r>
           </a:p>
           <a:p>
@@ -5268,56 +5876,38 @@
               <a:spcAft>
                 <a:spcPts val="800"/>
               </a:spcAft>
-              <a:defRPr sz="1300" b="1">
-                <a:solidFill>
-                  <a:srgbClr val="2B2D42"/>
-                </a:solidFill>
-                <a:latin typeface="Arial"/>
-              </a:defRPr>
-            </a:pPr>
-            <a:r>
-              <a:t>Xác thực</a:t>
-            </a:r>
-          </a:p>
-          <a:p>
-            <a:pPr>
-              <a:spcAft>
-                <a:spcPts val="500"/>
-              </a:spcAft>
-              <a:defRPr sz="1100" b="0">
-                <a:solidFill>
-                  <a:srgbClr val="8C919E"/>
-                </a:solidFill>
-                <a:latin typeface="Arial"/>
-              </a:defRPr>
-            </a:pPr>
-            <a:r>
-              <a:t>Đăng ký hoặc đăng nhập tài khoản người dùng.</a:t>
-            </a:r>
-          </a:p>
-        </p:txBody>
-      </p:sp>
-      <p:sp>
-        <p:nvSpPr>
-          <p:cNvPr id="6" name="Rounded Rectangle 5"/>
+              <a:defRPr sz="1200" b="0">
+                <a:solidFill>
+                  <a:srgbClr val="FFFFFF"/>
+                </a:solidFill>
+                <a:latin typeface="Arial"/>
+              </a:defRPr>
+            </a:pPr>
+            <a:r>
+              <a:t>Quản lý dữ liệu quan hệ (Users, Recipes, Favorites, Grocery). Ràng buộc khóa ngoại hỗ trợ tự động dọn dẹp rác.</a:t>
+            </a:r>
+          </a:p>
+        </p:txBody>
+      </p:sp>
+      <p:sp>
+        <p:nvSpPr>
+          <p:cNvPr id="6" name="Rectangle 5"/>
           <p:cNvSpPr/>
           <p:nvPr/>
         </p:nvSpPr>
         <p:spPr>
           <a:xfrm>
-            <a:off x="4251960" y="2011680"/>
-            <a:ext cx="1600200" cy="3200400"/>
-          </a:xfrm>
-          <a:prstGeom prst="roundRect">
+            <a:off x="6172200" y="2011680"/>
+            <a:ext cx="2468880" cy="3291840"/>
+          </a:xfrm>
+          <a:prstGeom prst="rect">
             <a:avLst/>
           </a:prstGeom>
           <a:solidFill>
-            <a:srgbClr val="FFFFFF"/>
+            <a:srgbClr val="2B2D42"/>
           </a:solidFill>
-          <a:ln w="19050">
-            <a:solidFill>
-              <a:srgbClr val="FF6B35"/>
-            </a:solidFill>
+          <a:ln>
+            <a:noFill/>
           </a:ln>
         </p:spPr>
         <p:style>
@@ -5335,14 +5925,14 @@
           </a:fontRef>
         </p:style>
         <p:txBody>
-          <a:bodyPr rtlCol="0" anchor="ctr" wrap="square" lIns="109728" rIns="109728" tIns="109728"/>
+          <a:bodyPr rtlCol="0" anchor="ctr" wrap="square" lIns="182880" rIns="182880" tIns="182880"/>
           <a:lstStyle/>
           <a:p>
             <a:pPr algn="ctr">
               <a:spcAft>
-                <a:spcPts val="500"/>
+                <a:spcPts val="200"/>
               </a:spcAft>
-              <a:defRPr sz="1200" b="1">
+              <a:defRPr sz="1800" b="1">
                 <a:solidFill>
                   <a:srgbClr val="FF6B35"/>
                 </a:solidFill>
@@ -5350,7 +5940,23 @@
               </a:defRPr>
             </a:pPr>
             <a:r>
-              <a:t>BƯỚC 3</a:t>
+              <a:t>SHAREDPREF</a:t>
+            </a:r>
+          </a:p>
+          <a:p>
+            <a:pPr>
+              <a:spcAft>
+                <a:spcPts val="1500"/>
+              </a:spcAft>
+              <a:defRPr sz="1100" b="1">
+                <a:solidFill>
+                  <a:srgbClr val="8C919E"/>
+                </a:solidFill>
+                <a:latin typeface="Arial"/>
+              </a:defRPr>
+            </a:pPr>
+            <a:r>
+              <a:t>Session Keeper</a:t>
             </a:r>
           </a:p>
           <a:p>
@@ -5358,56 +5964,38 @@
               <a:spcAft>
                 <a:spcPts val="800"/>
               </a:spcAft>
-              <a:defRPr sz="1300" b="1">
-                <a:solidFill>
-                  <a:srgbClr val="2B2D42"/>
-                </a:solidFill>
-                <a:latin typeface="Arial"/>
-              </a:defRPr>
-            </a:pPr>
-            <a:r>
-              <a:t>Khám phá</a:t>
-            </a:r>
-          </a:p>
-          <a:p>
-            <a:pPr>
-              <a:spcAft>
-                <a:spcPts val="500"/>
-              </a:spcAft>
-              <a:defRPr sz="1100" b="0">
-                <a:solidFill>
-                  <a:srgbClr val="8C919E"/>
-                </a:solidFill>
-                <a:latin typeface="Arial"/>
-              </a:defRPr>
-            </a:pPr>
-            <a:r>
-              <a:t>Xem danh mục, Today's Pick hoặc Tìm kiếm không dấu.</a:t>
-            </a:r>
-          </a:p>
-        </p:txBody>
-      </p:sp>
-      <p:sp>
-        <p:nvSpPr>
-          <p:cNvPr id="7" name="Rounded Rectangle 6"/>
+              <a:defRPr sz="1200" b="0">
+                <a:solidFill>
+                  <a:srgbClr val="FFFFFF"/>
+                </a:solidFill>
+                <a:latin typeface="Arial"/>
+              </a:defRPr>
+            </a:pPr>
+            <a:r>
+              <a:t>Lưu trữ phiên đăng nhập của người dùng ngoại tuyến cực kỳ gọn nhẹ dưới dạng Key-Value bảo mật.</a:t>
+            </a:r>
+          </a:p>
+        </p:txBody>
+      </p:sp>
+      <p:sp>
+        <p:nvSpPr>
+          <p:cNvPr id="7" name="Rectangle 6"/>
           <p:cNvSpPr/>
           <p:nvPr/>
         </p:nvSpPr>
         <p:spPr>
           <a:xfrm>
-            <a:off x="6035040" y="2011680"/>
-            <a:ext cx="1600200" cy="3200400"/>
-          </a:xfrm>
-          <a:prstGeom prst="roundRect">
+            <a:off x="8915400" y="2011680"/>
+            <a:ext cx="2468880" cy="3291840"/>
+          </a:xfrm>
+          <a:prstGeom prst="rect">
             <a:avLst/>
           </a:prstGeom>
           <a:solidFill>
-            <a:srgbClr val="FFFFFF"/>
+            <a:srgbClr val="2B2D42"/>
           </a:solidFill>
-          <a:ln w="19050">
-            <a:solidFill>
-              <a:srgbClr val="FF6B35"/>
-            </a:solidFill>
+          <a:ln>
+            <a:noFill/>
           </a:ln>
         </p:spPr>
         <p:style>
@@ -5425,14 +6013,14 @@
           </a:fontRef>
         </p:style>
         <p:txBody>
-          <a:bodyPr rtlCol="0" anchor="ctr" wrap="square" lIns="109728" rIns="109728" tIns="109728"/>
+          <a:bodyPr rtlCol="0" anchor="ctr" wrap="square" lIns="182880" rIns="182880" tIns="182880"/>
           <a:lstStyle/>
           <a:p>
             <a:pPr algn="ctr">
               <a:spcAft>
-                <a:spcPts val="500"/>
+                <a:spcPts val="200"/>
               </a:spcAft>
-              <a:defRPr sz="1200" b="1">
+              <a:defRPr sz="1800" b="1">
                 <a:solidFill>
                   <a:srgbClr val="FF6B35"/>
                 </a:solidFill>
@@ -5440,7 +6028,23 @@
               </a:defRPr>
             </a:pPr>
             <a:r>
-              <a:t>BƯỚC 4</a:t>
+              <a:t>MATERIAL DESIGN</a:t>
+            </a:r>
+          </a:p>
+          <a:p>
+            <a:pPr>
+              <a:spcAft>
+                <a:spcPts val="1500"/>
+              </a:spcAft>
+              <a:defRPr sz="1100" b="1">
+                <a:solidFill>
+                  <a:srgbClr val="8C919E"/>
+                </a:solidFill>
+                <a:latin typeface="Arial"/>
+              </a:defRPr>
+            </a:pPr>
+            <a:r>
+              <a:t>Modern Interface</a:t>
             </a:r>
           </a:p>
           <a:p>
@@ -5448,211 +6052,15 @@
               <a:spcAft>
                 <a:spcPts val="800"/>
               </a:spcAft>
-              <a:defRPr sz="1300" b="1">
-                <a:solidFill>
-                  <a:srgbClr val="2B2D42"/>
-                </a:solidFill>
-                <a:latin typeface="Arial"/>
-              </a:defRPr>
-            </a:pPr>
-            <a:r>
-              <a:t>Xem chi tiết</a:t>
-            </a:r>
-          </a:p>
-          <a:p>
-            <a:pPr>
-              <a:spcAft>
-                <a:spcPts val="500"/>
-              </a:spcAft>
-              <a:defRPr sz="1100" b="0">
-                <a:solidFill>
-                  <a:srgbClr val="8C919E"/>
-                </a:solidFill>
-                <a:latin typeface="Arial"/>
-              </a:defRPr>
-            </a:pPr>
-            <a:r>
-              <a:t>Xem các bước nấu ăn và danh sách nguyên liệu.</a:t>
-            </a:r>
-          </a:p>
-        </p:txBody>
-      </p:sp>
-      <p:sp>
-        <p:nvSpPr>
-          <p:cNvPr id="8" name="Rounded Rectangle 7"/>
-          <p:cNvSpPr/>
-          <p:nvPr/>
-        </p:nvSpPr>
-        <p:spPr>
-          <a:xfrm>
-            <a:off x="7818120" y="2011680"/>
-            <a:ext cx="1600200" cy="3200400"/>
-          </a:xfrm>
-          <a:prstGeom prst="roundRect">
-            <a:avLst/>
-          </a:prstGeom>
-          <a:solidFill>
-            <a:srgbClr val="FFFFFF"/>
-          </a:solidFill>
-          <a:ln w="19050">
-            <a:solidFill>
-              <a:srgbClr val="FF6B35"/>
-            </a:solidFill>
-          </a:ln>
-        </p:spPr>
-        <p:style>
-          <a:lnRef idx="1">
-            <a:schemeClr val="accent1"/>
-          </a:lnRef>
-          <a:fillRef idx="3">
-            <a:schemeClr val="accent1"/>
-          </a:fillRef>
-          <a:effectRef idx="2">
-            <a:schemeClr val="accent1"/>
-          </a:effectRef>
-          <a:fontRef idx="minor">
-            <a:schemeClr val="lt1"/>
-          </a:fontRef>
-        </p:style>
-        <p:txBody>
-          <a:bodyPr rtlCol="0" anchor="ctr" wrap="square" lIns="109728" rIns="109728" tIns="109728"/>
-          <a:lstStyle/>
-          <a:p>
-            <a:pPr algn="ctr">
-              <a:spcAft>
-                <a:spcPts val="500"/>
-              </a:spcAft>
-              <a:defRPr sz="1200" b="1">
-                <a:solidFill>
-                  <a:srgbClr val="FF6B35"/>
-                </a:solidFill>
-                <a:latin typeface="Arial"/>
-              </a:defRPr>
-            </a:pPr>
-            <a:r>
-              <a:t>BƯỚC 5</a:t>
-            </a:r>
-          </a:p>
-          <a:p>
-            <a:pPr>
-              <a:spcAft>
-                <a:spcPts val="800"/>
-              </a:spcAft>
-              <a:defRPr sz="1300" b="1">
-                <a:solidFill>
-                  <a:srgbClr val="2B2D42"/>
-                </a:solidFill>
-                <a:latin typeface="Arial"/>
-              </a:defRPr>
-            </a:pPr>
-            <a:r>
-              <a:t>Lưu &amp; Đi chợ</a:t>
-            </a:r>
-          </a:p>
-          <a:p>
-            <a:pPr>
-              <a:spcAft>
-                <a:spcPts val="500"/>
-              </a:spcAft>
-              <a:defRPr sz="1100" b="0">
-                <a:solidFill>
-                  <a:srgbClr val="8C919E"/>
-                </a:solidFill>
-                <a:latin typeface="Arial"/>
-              </a:defRPr>
-            </a:pPr>
-            <a:r>
-              <a:t>Thả tim yêu thích và bấm thêm đồ đi chợ.</a:t>
-            </a:r>
-          </a:p>
-        </p:txBody>
-      </p:sp>
-      <p:sp>
-        <p:nvSpPr>
-          <p:cNvPr id="9" name="Rounded Rectangle 8"/>
-          <p:cNvSpPr/>
-          <p:nvPr/>
-        </p:nvSpPr>
-        <p:spPr>
-          <a:xfrm>
-            <a:off x="9601200" y="2011680"/>
-            <a:ext cx="1600200" cy="3200400"/>
-          </a:xfrm>
-          <a:prstGeom prst="roundRect">
-            <a:avLst/>
-          </a:prstGeom>
-          <a:solidFill>
-            <a:srgbClr val="FFFFFF"/>
-          </a:solidFill>
-          <a:ln w="19050">
-            <a:solidFill>
-              <a:srgbClr val="FF6B35"/>
-            </a:solidFill>
-          </a:ln>
-        </p:spPr>
-        <p:style>
-          <a:lnRef idx="1">
-            <a:schemeClr val="accent1"/>
-          </a:lnRef>
-          <a:fillRef idx="3">
-            <a:schemeClr val="accent1"/>
-          </a:fillRef>
-          <a:effectRef idx="2">
-            <a:schemeClr val="accent1"/>
-          </a:effectRef>
-          <a:fontRef idx="minor">
-            <a:schemeClr val="lt1"/>
-          </a:fontRef>
-        </p:style>
-        <p:txBody>
-          <a:bodyPr rtlCol="0" anchor="ctr" wrap="square" lIns="109728" rIns="109728" tIns="109728"/>
-          <a:lstStyle/>
-          <a:p>
-            <a:pPr algn="ctr">
-              <a:spcAft>
-                <a:spcPts val="500"/>
-              </a:spcAft>
-              <a:defRPr sz="1200" b="1">
-                <a:solidFill>
-                  <a:srgbClr val="FF6B35"/>
-                </a:solidFill>
-                <a:latin typeface="Arial"/>
-              </a:defRPr>
-            </a:pPr>
-            <a:r>
-              <a:t>BƯỚC 6</a:t>
-            </a:r>
-          </a:p>
-          <a:p>
-            <a:pPr>
-              <a:spcAft>
-                <a:spcPts val="800"/>
-              </a:spcAft>
-              <a:defRPr sz="1300" b="1">
-                <a:solidFill>
-                  <a:srgbClr val="2B2D42"/>
-                </a:solidFill>
-                <a:latin typeface="Arial"/>
-              </a:defRPr>
-            </a:pPr>
-            <a:r>
-              <a:t>Đi chợ &amp; Lưu LS</a:t>
-            </a:r>
-          </a:p>
-          <a:p>
-            <a:pPr>
-              <a:spcAft>
-                <a:spcPts val="500"/>
-              </a:spcAft>
-              <a:defRPr sz="1100" b="0">
-                <a:solidFill>
-                  <a:srgbClr val="8C919E"/>
-                </a:solidFill>
-                <a:latin typeface="Arial"/>
-              </a:defRPr>
-            </a:pPr>
-            <a:r>
-              <a:t>Tích mua nguyên liệu hoàn tất &amp; Lưu lịch sử nấu.</a:t>
+              <a:defRPr sz="1200" b="0">
+                <a:solidFill>
+                  <a:srgbClr val="FFFFFF"/>
+                </a:solidFill>
+                <a:latin typeface="Arial"/>
+              </a:defRPr>
+            </a:pPr>
+            <a:r>
+              <a:t>RecyclerView lồng nhau (Nested RV), BottomNavigationView hiện đại, custom Adapter cho lưới và tiến trình.</a:t>
             </a:r>
           </a:p>
         </p:txBody>
@@ -5671,7 +6079,7 @@
     <p:bg>
       <p:bgPr>
         <a:solidFill>
-          <a:srgbClr val="FAFAFA"/>
+          <a:srgbClr val="F5F7FA"/>
         </a:solidFill>
         <a:effectLst/>
       </p:bgPr>
@@ -5691,7 +6099,7 @@
         </p:nvSpPr>
         <p:spPr>
           <a:xfrm>
-            <a:off x="685800" y="457200"/>
+            <a:off x="685800" y="365760"/>
             <a:ext cx="10820095" cy="731520"/>
           </a:xfrm>
           <a:prstGeom prst="rect">
@@ -5706,7 +6114,7 @@
           <a:lstStyle/>
           <a:p>
             <a:pPr>
-              <a:defRPr sz="2600" b="1">
+              <a:defRPr sz="2400" b="1">
                 <a:solidFill>
                   <a:srgbClr val="2B2D42"/>
                 </a:solidFill>
@@ -5714,7 +6122,7 @@
               </a:defRPr>
             </a:pPr>
             <a:r>
-              <a:t>TRANG CHỦ &amp; TÌM KIẾM KHÔNG DẤU</a:t>
+              <a:t>LUỒNG HOẠT ĐỘNG CHÍNH CỦA NGƯỜI DÙNG</a:t>
             </a:r>
           </a:p>
         </p:txBody>
@@ -5727,8 +6135,8 @@
         </p:nvSpPr>
         <p:spPr>
           <a:xfrm>
-            <a:off x="685800" y="1097280"/>
-            <a:ext cx="1097280" cy="45720"/>
+            <a:off x="685800" y="1051560"/>
+            <a:ext cx="1097280" cy="54864"/>
           </a:xfrm>
           <a:prstGeom prst="rect">
             <a:avLst/>
@@ -5737,9 +6145,7 @@
             <a:srgbClr val="FF6B35"/>
           </a:solidFill>
           <a:ln>
-            <a:solidFill>
-              <a:srgbClr val="FF6B35"/>
-            </a:solidFill>
+            <a:noFill/>
           </a:ln>
         </p:spPr>
         <p:style>
@@ -5766,161 +6172,25 @@
       </p:sp>
       <p:sp>
         <p:nvSpPr>
-          <p:cNvPr id="4" name="TextBox 3"/>
-          <p:cNvSpPr txBox="1"/>
-          <p:nvPr/>
-        </p:nvSpPr>
-        <p:spPr>
-          <a:xfrm>
-            <a:off x="685800" y="1645920"/>
-            <a:ext cx="5486400" cy="4389120"/>
-          </a:xfrm>
-          <a:prstGeom prst="rect">
-            <a:avLst/>
-          </a:prstGeom>
-          <a:noFill/>
-        </p:spPr>
-        <p:txBody>
-          <a:bodyPr wrap="square">
-            <a:spAutoFit/>
-          </a:bodyPr>
-          <a:lstStyle/>
-          <a:p>
-            <a:pPr>
-              <a:spcAft>
-                <a:spcPts val="800"/>
-              </a:spcAft>
-              <a:defRPr sz="1800" b="1">
-                <a:solidFill>
-                  <a:srgbClr val="FF6B35"/>
-                </a:solidFill>
-                <a:latin typeface="Arial"/>
-              </a:defRPr>
-            </a:pPr>
-            <a:r>
-              <a:t>• Trang chủ (HomeFragment):</a:t>
-            </a:r>
-          </a:p>
-          <a:p>
-            <a:pPr>
-              <a:spcAft>
-                <a:spcPts val="500"/>
-              </a:spcAft>
-              <a:defRPr sz="1500" b="0">
-                <a:solidFill>
-                  <a:srgbClr val="2B2D42"/>
-                </a:solidFill>
-                <a:latin typeface="Arial"/>
-              </a:defRPr>
-            </a:pPr>
-            <a:r>
-              <a:t>   - Hiển thị danh sách Danh mục món ăn (Category).</a:t>
-            </a:r>
-          </a:p>
-          <a:p>
-            <a:pPr>
-              <a:spcAft>
-                <a:spcPts val="500"/>
-              </a:spcAft>
-              <a:defRPr sz="1500" b="0">
-                <a:solidFill>
-                  <a:srgbClr val="2B2D42"/>
-                </a:solidFill>
-                <a:latin typeface="Arial"/>
-              </a:defRPr>
-            </a:pPr>
-            <a:r>
-              <a:t>   - Gợi ý món phổ biến (Popular Recipes) dựa trên Rating cao.</a:t>
-            </a:r>
-          </a:p>
-          <a:p>
-            <a:pPr>
-              <a:spcAft>
-                <a:spcPts val="1500"/>
-              </a:spcAft>
-              <a:defRPr sz="1500" b="0">
-                <a:solidFill>
-                  <a:srgbClr val="2B2D42"/>
-                </a:solidFill>
-                <a:latin typeface="Arial"/>
-              </a:defRPr>
-            </a:pPr>
-            <a:r>
-              <a:t>   - Đề xuất ngẫu nhiên món hôm nay (Today's Pick - getRandomRecipe).</a:t>
-            </a:r>
-          </a:p>
-          <a:p>
-            <a:pPr>
-              <a:spcAft>
-                <a:spcPts val="800"/>
-              </a:spcAft>
-              <a:defRPr sz="1800" b="1">
-                <a:solidFill>
-                  <a:srgbClr val="FF6B35"/>
-                </a:solidFill>
-                <a:latin typeface="Arial"/>
-              </a:defRPr>
-            </a:pPr>
-            <a:r>
-              <a:t>• Tìm kiếm thông minh (SearchFragment):</a:t>
-            </a:r>
-          </a:p>
-          <a:p>
-            <a:pPr>
-              <a:spcAft>
-                <a:spcPts val="500"/>
-              </a:spcAft>
-              <a:defRPr sz="1500" b="0">
-                <a:solidFill>
-                  <a:srgbClr val="2B2D42"/>
-                </a:solidFill>
-                <a:latin typeface="Arial"/>
-              </a:defRPr>
-            </a:pPr>
-            <a:r>
-              <a:t>   - Sử dụng StringHelper.removeAccents loại bỏ tiếng Việt có dấu.</a:t>
-            </a:r>
-          </a:p>
-          <a:p>
-            <a:pPr>
-              <a:spcAft>
-                <a:spcPts val="500"/>
-              </a:spcAft>
-              <a:defRPr sz="1500" b="0">
-                <a:solidFill>
-                  <a:srgbClr val="2B2D42"/>
-                </a:solidFill>
-                <a:latin typeface="Arial"/>
-              </a:defRPr>
-            </a:pPr>
-            <a:r>
-              <a:t>   - Cho phép gõ 'pho bo' vẫn ra 'Phở Bò Hà Nội', nâng cao trải nghiệm tìm kiếm của người dùng.</a:t>
-            </a:r>
-          </a:p>
-        </p:txBody>
-      </p:sp>
-      <p:sp>
-        <p:nvSpPr>
-          <p:cNvPr id="5" name="Rounded Rectangle 4"/>
+          <p:cNvPr id="4" name="Rounded Rectangle 3"/>
           <p:cNvSpPr/>
           <p:nvPr/>
         </p:nvSpPr>
         <p:spPr>
           <a:xfrm>
-            <a:off x="6858000" y="1645920"/>
-            <a:ext cx="2011680" cy="4023360"/>
+            <a:off x="685800" y="2011680"/>
+            <a:ext cx="1600200" cy="3108960"/>
           </a:xfrm>
           <a:prstGeom prst="roundRect">
             <a:avLst/>
           </a:prstGeom>
           <a:solidFill>
-            <a:srgbClr val="F0F0F3"/>
+            <a:srgbClr val="FFFFFF"/>
           </a:solidFill>
           <a:ln w="19050">
             <a:solidFill>
-              <a:srgbClr val="B4B4B9"/>
+              <a:srgbClr val="FF6B35"/>
             </a:solidFill>
-            <a:prstDash val="sysDash"/>
           </a:ln>
         </p:spPr>
         <p:style>
@@ -5938,57 +6208,77 @@
           </a:fontRef>
         </p:style>
         <p:txBody>
-          <a:bodyPr rtlCol="0" anchor="ctr" wrap="square" tIns="91440" bIns="91440"/>
+          <a:bodyPr rtlCol="0" anchor="ctr" wrap="square" lIns="109728" rIns="109728" tIns="109728"/>
           <a:lstStyle/>
           <a:p>
             <a:pPr algn="ctr">
-              <a:defRPr sz="1000" b="1">
+              <a:spcAft>
+                <a:spcPts val="500"/>
+              </a:spcAft>
+              <a:defRPr sz="1200" b="1">
+                <a:solidFill>
+                  <a:srgbClr val="FF6B35"/>
+                </a:solidFill>
+                <a:latin typeface="Arial"/>
+              </a:defRPr>
+            </a:pPr>
+            <a:r>
+              <a:t>BƯỚC 1</a:t>
+            </a:r>
+          </a:p>
+          <a:p>
+            <a:pPr>
+              <a:spcAft>
+                <a:spcPts val="800"/>
+              </a:spcAft>
+              <a:defRPr sz="1300" b="1">
+                <a:solidFill>
+                  <a:srgbClr val="2B2D42"/>
+                </a:solidFill>
+                <a:latin typeface="Arial"/>
+              </a:defRPr>
+            </a:pPr>
+            <a:r>
+              <a:t>Khởi động</a:t>
+            </a:r>
+          </a:p>
+          <a:p>
+            <a:pPr>
+              <a:spcAft>
+                <a:spcPts val="500"/>
+              </a:spcAft>
+              <a:defRPr sz="1100" b="0">
                 <a:solidFill>
                   <a:srgbClr val="8C919E"/>
                 </a:solidFill>
                 <a:latin typeface="Arial"/>
               </a:defRPr>
             </a:pPr>
-            <a:br/>
-            <a:br/>
-            <a:br/>
-            <a:br/>
-            <a:r>
-              <a:t>[ Kéo ảnh ]</a:t>
-            </a:r>
-            <a:br/>
-            <a:r>
-              <a:t>Màn Trang chủ</a:t>
-            </a:r>
-            <a:br/>
-            <a:r>
-              <a:t>(HomeFragment)</a:t>
-            </a:r>
-          </a:p>
-        </p:txBody>
-      </p:sp>
-      <p:sp>
-        <p:nvSpPr>
-          <p:cNvPr id="6" name="Rounded Rectangle 5"/>
+            <a:r>
+              <a:t>Splash screen giới thiệu thương hiệu ứng dụng.</a:t>
+            </a:r>
+          </a:p>
+        </p:txBody>
+      </p:sp>
+      <p:sp>
+        <p:nvSpPr>
+          <p:cNvPr id="5" name="Right Arrow 4"/>
           <p:cNvSpPr/>
           <p:nvPr/>
         </p:nvSpPr>
         <p:spPr>
           <a:xfrm>
-            <a:off x="9235440" y="1645920"/>
-            <a:ext cx="2011680" cy="4023360"/>
-          </a:xfrm>
-          <a:prstGeom prst="roundRect">
+            <a:off x="2313432" y="3291840"/>
+            <a:ext cx="128016" cy="128016"/>
+          </a:xfrm>
+          <a:prstGeom prst="rightArrow">
             <a:avLst/>
           </a:prstGeom>
           <a:solidFill>
-            <a:srgbClr val="F0F0F3"/>
+            <a:srgbClr val="FF6B35"/>
           </a:solidFill>
-          <a:ln w="19050">
-            <a:solidFill>
-              <a:srgbClr val="B4B4B9"/>
-            </a:solidFill>
-            <a:prstDash val="sysDash"/>
+          <a:ln>
+            <a:noFill/>
           </a:ln>
         </p:spPr>
         <p:style>
@@ -6006,31 +6296,631 @@
           </a:fontRef>
         </p:style>
         <p:txBody>
-          <a:bodyPr rtlCol="0" anchor="ctr" wrap="square" tIns="91440" bIns="91440"/>
+          <a:bodyPr rtlCol="0" anchor="ctr"/>
+          <a:lstStyle/>
+          <a:p>
+            <a:pPr algn="ctr"/>
+          </a:p>
+        </p:txBody>
+      </p:sp>
+      <p:sp>
+        <p:nvSpPr>
+          <p:cNvPr id="6" name="Rounded Rectangle 5"/>
+          <p:cNvSpPr/>
+          <p:nvPr/>
+        </p:nvSpPr>
+        <p:spPr>
+          <a:xfrm>
+            <a:off x="2468880" y="2011680"/>
+            <a:ext cx="1600200" cy="3108960"/>
+          </a:xfrm>
+          <a:prstGeom prst="roundRect">
+            <a:avLst/>
+          </a:prstGeom>
+          <a:solidFill>
+            <a:srgbClr val="FFFFFF"/>
+          </a:solidFill>
+          <a:ln w="19050">
+            <a:solidFill>
+              <a:srgbClr val="FF6B35"/>
+            </a:solidFill>
+          </a:ln>
+        </p:spPr>
+        <p:style>
+          <a:lnRef idx="1">
+            <a:schemeClr val="accent1"/>
+          </a:lnRef>
+          <a:fillRef idx="3">
+            <a:schemeClr val="accent1"/>
+          </a:fillRef>
+          <a:effectRef idx="2">
+            <a:schemeClr val="accent1"/>
+          </a:effectRef>
+          <a:fontRef idx="minor">
+            <a:schemeClr val="lt1"/>
+          </a:fontRef>
+        </p:style>
+        <p:txBody>
+          <a:bodyPr rtlCol="0" anchor="ctr" wrap="square" lIns="109728" rIns="109728" tIns="109728"/>
           <a:lstStyle/>
           <a:p>
             <a:pPr algn="ctr">
-              <a:defRPr sz="1000" b="1">
+              <a:spcAft>
+                <a:spcPts val="500"/>
+              </a:spcAft>
+              <a:defRPr sz="1200" b="1">
+                <a:solidFill>
+                  <a:srgbClr val="FF6B35"/>
+                </a:solidFill>
+                <a:latin typeface="Arial"/>
+              </a:defRPr>
+            </a:pPr>
+            <a:r>
+              <a:t>BƯỚC 2</a:t>
+            </a:r>
+          </a:p>
+          <a:p>
+            <a:pPr>
+              <a:spcAft>
+                <a:spcPts val="800"/>
+              </a:spcAft>
+              <a:defRPr sz="1300" b="1">
+                <a:solidFill>
+                  <a:srgbClr val="2B2D42"/>
+                </a:solidFill>
+                <a:latin typeface="Arial"/>
+              </a:defRPr>
+            </a:pPr>
+            <a:r>
+              <a:t>Đăng nhập</a:t>
+            </a:r>
+          </a:p>
+          <a:p>
+            <a:pPr>
+              <a:spcAft>
+                <a:spcPts val="500"/>
+              </a:spcAft>
+              <a:defRPr sz="1100" b="0">
                 <a:solidFill>
                   <a:srgbClr val="8C919E"/>
                 </a:solidFill>
                 <a:latin typeface="Arial"/>
               </a:defRPr>
             </a:pPr>
-            <a:br/>
-            <a:br/>
-            <a:br/>
-            <a:br/>
-            <a:r>
-              <a:t>[ Kéo ảnh ]</a:t>
-            </a:r>
-            <a:br/>
-            <a:r>
-              <a:t>Màn Tìm kiếm</a:t>
-            </a:r>
-            <a:br/>
-            <a:r>
-              <a:t>(SearchFragment)</a:t>
+            <a:r>
+              <a:t>Xác thực tài khoản và kiểm tra phiên người dùng.</a:t>
+            </a:r>
+          </a:p>
+        </p:txBody>
+      </p:sp>
+      <p:sp>
+        <p:nvSpPr>
+          <p:cNvPr id="7" name="Right Arrow 6"/>
+          <p:cNvSpPr/>
+          <p:nvPr/>
+        </p:nvSpPr>
+        <p:spPr>
+          <a:xfrm>
+            <a:off x="4096512" y="3291840"/>
+            <a:ext cx="128016" cy="128016"/>
+          </a:xfrm>
+          <a:prstGeom prst="rightArrow">
+            <a:avLst/>
+          </a:prstGeom>
+          <a:solidFill>
+            <a:srgbClr val="FF6B35"/>
+          </a:solidFill>
+          <a:ln>
+            <a:noFill/>
+          </a:ln>
+        </p:spPr>
+        <p:style>
+          <a:lnRef idx="1">
+            <a:schemeClr val="accent1"/>
+          </a:lnRef>
+          <a:fillRef idx="3">
+            <a:schemeClr val="accent1"/>
+          </a:fillRef>
+          <a:effectRef idx="2">
+            <a:schemeClr val="accent1"/>
+          </a:effectRef>
+          <a:fontRef idx="minor">
+            <a:schemeClr val="lt1"/>
+          </a:fontRef>
+        </p:style>
+        <p:txBody>
+          <a:bodyPr rtlCol="0" anchor="ctr"/>
+          <a:lstStyle/>
+          <a:p>
+            <a:pPr algn="ctr"/>
+          </a:p>
+        </p:txBody>
+      </p:sp>
+      <p:sp>
+        <p:nvSpPr>
+          <p:cNvPr id="8" name="Rounded Rectangle 7"/>
+          <p:cNvSpPr/>
+          <p:nvPr/>
+        </p:nvSpPr>
+        <p:spPr>
+          <a:xfrm>
+            <a:off x="4251960" y="2011680"/>
+            <a:ext cx="1600200" cy="3108960"/>
+          </a:xfrm>
+          <a:prstGeom prst="roundRect">
+            <a:avLst/>
+          </a:prstGeom>
+          <a:solidFill>
+            <a:srgbClr val="FFFFFF"/>
+          </a:solidFill>
+          <a:ln w="19050">
+            <a:solidFill>
+              <a:srgbClr val="FF6B35"/>
+            </a:solidFill>
+          </a:ln>
+        </p:spPr>
+        <p:style>
+          <a:lnRef idx="1">
+            <a:schemeClr val="accent1"/>
+          </a:lnRef>
+          <a:fillRef idx="3">
+            <a:schemeClr val="accent1"/>
+          </a:fillRef>
+          <a:effectRef idx="2">
+            <a:schemeClr val="accent1"/>
+          </a:effectRef>
+          <a:fontRef idx="minor">
+            <a:schemeClr val="lt1"/>
+          </a:fontRef>
+        </p:style>
+        <p:txBody>
+          <a:bodyPr rtlCol="0" anchor="ctr" wrap="square" lIns="109728" rIns="109728" tIns="109728"/>
+          <a:lstStyle/>
+          <a:p>
+            <a:pPr algn="ctr">
+              <a:spcAft>
+                <a:spcPts val="500"/>
+              </a:spcAft>
+              <a:defRPr sz="1200" b="1">
+                <a:solidFill>
+                  <a:srgbClr val="FF6B35"/>
+                </a:solidFill>
+                <a:latin typeface="Arial"/>
+              </a:defRPr>
+            </a:pPr>
+            <a:r>
+              <a:t>BƯỚC 3</a:t>
+            </a:r>
+          </a:p>
+          <a:p>
+            <a:pPr>
+              <a:spcAft>
+                <a:spcPts val="800"/>
+              </a:spcAft>
+              <a:defRPr sz="1300" b="1">
+                <a:solidFill>
+                  <a:srgbClr val="2B2D42"/>
+                </a:solidFill>
+                <a:latin typeface="Arial"/>
+              </a:defRPr>
+            </a:pPr>
+            <a:r>
+              <a:t>Khám phá</a:t>
+            </a:r>
+          </a:p>
+          <a:p>
+            <a:pPr>
+              <a:spcAft>
+                <a:spcPts val="500"/>
+              </a:spcAft>
+              <a:defRPr sz="1100" b="0">
+                <a:solidFill>
+                  <a:srgbClr val="8C919E"/>
+                </a:solidFill>
+                <a:latin typeface="Arial"/>
+              </a:defRPr>
+            </a:pPr>
+            <a:r>
+              <a:t>Duyệt danh mục hoặc Tìm kiếm không dấu tại Home.</a:t>
+            </a:r>
+          </a:p>
+        </p:txBody>
+      </p:sp>
+      <p:sp>
+        <p:nvSpPr>
+          <p:cNvPr id="9" name="Right Arrow 8"/>
+          <p:cNvSpPr/>
+          <p:nvPr/>
+        </p:nvSpPr>
+        <p:spPr>
+          <a:xfrm>
+            <a:off x="5879592" y="3291840"/>
+            <a:ext cx="128016" cy="128016"/>
+          </a:xfrm>
+          <a:prstGeom prst="rightArrow">
+            <a:avLst/>
+          </a:prstGeom>
+          <a:solidFill>
+            <a:srgbClr val="FF6B35"/>
+          </a:solidFill>
+          <a:ln>
+            <a:noFill/>
+          </a:ln>
+        </p:spPr>
+        <p:style>
+          <a:lnRef idx="1">
+            <a:schemeClr val="accent1"/>
+          </a:lnRef>
+          <a:fillRef idx="3">
+            <a:schemeClr val="accent1"/>
+          </a:fillRef>
+          <a:effectRef idx="2">
+            <a:schemeClr val="accent1"/>
+          </a:effectRef>
+          <a:fontRef idx="minor">
+            <a:schemeClr val="lt1"/>
+          </a:fontRef>
+        </p:style>
+        <p:txBody>
+          <a:bodyPr rtlCol="0" anchor="ctr"/>
+          <a:lstStyle/>
+          <a:p>
+            <a:pPr algn="ctr"/>
+          </a:p>
+        </p:txBody>
+      </p:sp>
+      <p:sp>
+        <p:nvSpPr>
+          <p:cNvPr id="10" name="Rounded Rectangle 9"/>
+          <p:cNvSpPr/>
+          <p:nvPr/>
+        </p:nvSpPr>
+        <p:spPr>
+          <a:xfrm>
+            <a:off x="6035040" y="2011680"/>
+            <a:ext cx="1600200" cy="3108960"/>
+          </a:xfrm>
+          <a:prstGeom prst="roundRect">
+            <a:avLst/>
+          </a:prstGeom>
+          <a:solidFill>
+            <a:srgbClr val="FFFFFF"/>
+          </a:solidFill>
+          <a:ln w="19050">
+            <a:solidFill>
+              <a:srgbClr val="FF6B35"/>
+            </a:solidFill>
+          </a:ln>
+        </p:spPr>
+        <p:style>
+          <a:lnRef idx="1">
+            <a:schemeClr val="accent1"/>
+          </a:lnRef>
+          <a:fillRef idx="3">
+            <a:schemeClr val="accent1"/>
+          </a:fillRef>
+          <a:effectRef idx="2">
+            <a:schemeClr val="accent1"/>
+          </a:effectRef>
+          <a:fontRef idx="minor">
+            <a:schemeClr val="lt1"/>
+          </a:fontRef>
+        </p:style>
+        <p:txBody>
+          <a:bodyPr rtlCol="0" anchor="ctr" wrap="square" lIns="109728" rIns="109728" tIns="109728"/>
+          <a:lstStyle/>
+          <a:p>
+            <a:pPr algn="ctr">
+              <a:spcAft>
+                <a:spcPts val="500"/>
+              </a:spcAft>
+              <a:defRPr sz="1200" b="1">
+                <a:solidFill>
+                  <a:srgbClr val="FF6B35"/>
+                </a:solidFill>
+                <a:latin typeface="Arial"/>
+              </a:defRPr>
+            </a:pPr>
+            <a:r>
+              <a:t>BƯỚC 4</a:t>
+            </a:r>
+          </a:p>
+          <a:p>
+            <a:pPr>
+              <a:spcAft>
+                <a:spcPts val="800"/>
+              </a:spcAft>
+              <a:defRPr sz="1300" b="1">
+                <a:solidFill>
+                  <a:srgbClr val="2B2D42"/>
+                </a:solidFill>
+                <a:latin typeface="Arial"/>
+              </a:defRPr>
+            </a:pPr>
+            <a:r>
+              <a:t>Xem chi tiết</a:t>
+            </a:r>
+          </a:p>
+          <a:p>
+            <a:pPr>
+              <a:spcAft>
+                <a:spcPts val="500"/>
+              </a:spcAft>
+              <a:defRPr sz="1100" b="0">
+                <a:solidFill>
+                  <a:srgbClr val="8C919E"/>
+                </a:solidFill>
+                <a:latin typeface="Arial"/>
+              </a:defRPr>
+            </a:pPr>
+            <a:r>
+              <a:t>Đọc nguyên liệu chuẩn bị và hướng dẫn nấu món.</a:t>
+            </a:r>
+          </a:p>
+        </p:txBody>
+      </p:sp>
+      <p:sp>
+        <p:nvSpPr>
+          <p:cNvPr id="11" name="Right Arrow 10"/>
+          <p:cNvSpPr/>
+          <p:nvPr/>
+        </p:nvSpPr>
+        <p:spPr>
+          <a:xfrm>
+            <a:off x="7662672" y="3291840"/>
+            <a:ext cx="128016" cy="128016"/>
+          </a:xfrm>
+          <a:prstGeom prst="rightArrow">
+            <a:avLst/>
+          </a:prstGeom>
+          <a:solidFill>
+            <a:srgbClr val="FF6B35"/>
+          </a:solidFill>
+          <a:ln>
+            <a:noFill/>
+          </a:ln>
+        </p:spPr>
+        <p:style>
+          <a:lnRef idx="1">
+            <a:schemeClr val="accent1"/>
+          </a:lnRef>
+          <a:fillRef idx="3">
+            <a:schemeClr val="accent1"/>
+          </a:fillRef>
+          <a:effectRef idx="2">
+            <a:schemeClr val="accent1"/>
+          </a:effectRef>
+          <a:fontRef idx="minor">
+            <a:schemeClr val="lt1"/>
+          </a:fontRef>
+        </p:style>
+        <p:txBody>
+          <a:bodyPr rtlCol="0" anchor="ctr"/>
+          <a:lstStyle/>
+          <a:p>
+            <a:pPr algn="ctr"/>
+          </a:p>
+        </p:txBody>
+      </p:sp>
+      <p:sp>
+        <p:nvSpPr>
+          <p:cNvPr id="12" name="Rounded Rectangle 11"/>
+          <p:cNvSpPr/>
+          <p:nvPr/>
+        </p:nvSpPr>
+        <p:spPr>
+          <a:xfrm>
+            <a:off x="7818120" y="2011680"/>
+            <a:ext cx="1600200" cy="3108960"/>
+          </a:xfrm>
+          <a:prstGeom prst="roundRect">
+            <a:avLst/>
+          </a:prstGeom>
+          <a:solidFill>
+            <a:srgbClr val="FFFFFF"/>
+          </a:solidFill>
+          <a:ln w="19050">
+            <a:solidFill>
+              <a:srgbClr val="FF6B35"/>
+            </a:solidFill>
+          </a:ln>
+        </p:spPr>
+        <p:style>
+          <a:lnRef idx="1">
+            <a:schemeClr val="accent1"/>
+          </a:lnRef>
+          <a:fillRef idx="3">
+            <a:schemeClr val="accent1"/>
+          </a:fillRef>
+          <a:effectRef idx="2">
+            <a:schemeClr val="accent1"/>
+          </a:effectRef>
+          <a:fontRef idx="minor">
+            <a:schemeClr val="lt1"/>
+          </a:fontRef>
+        </p:style>
+        <p:txBody>
+          <a:bodyPr rtlCol="0" anchor="ctr" wrap="square" lIns="109728" rIns="109728" tIns="109728"/>
+          <a:lstStyle/>
+          <a:p>
+            <a:pPr algn="ctr">
+              <a:spcAft>
+                <a:spcPts val="500"/>
+              </a:spcAft>
+              <a:defRPr sz="1200" b="1">
+                <a:solidFill>
+                  <a:srgbClr val="FF6B35"/>
+                </a:solidFill>
+                <a:latin typeface="Arial"/>
+              </a:defRPr>
+            </a:pPr>
+            <a:r>
+              <a:t>BƯỚC 5</a:t>
+            </a:r>
+          </a:p>
+          <a:p>
+            <a:pPr>
+              <a:spcAft>
+                <a:spcPts val="800"/>
+              </a:spcAft>
+              <a:defRPr sz="1300" b="1">
+                <a:solidFill>
+                  <a:srgbClr val="2B2D42"/>
+                </a:solidFill>
+                <a:latin typeface="Arial"/>
+              </a:defRPr>
+            </a:pPr>
+            <a:r>
+              <a:t>Lưu &amp; Chọn</a:t>
+            </a:r>
+          </a:p>
+          <a:p>
+            <a:pPr>
+              <a:spcAft>
+                <a:spcPts val="500"/>
+              </a:spcAft>
+              <a:defRPr sz="1100" b="0">
+                <a:solidFill>
+                  <a:srgbClr val="8C919E"/>
+                </a:solidFill>
+                <a:latin typeface="Arial"/>
+              </a:defRPr>
+            </a:pPr>
+            <a:r>
+              <a:t>Thả tim yêu thích, thêm nguyên liệu đi chợ.</a:t>
+            </a:r>
+          </a:p>
+        </p:txBody>
+      </p:sp>
+      <p:sp>
+        <p:nvSpPr>
+          <p:cNvPr id="13" name="Right Arrow 12"/>
+          <p:cNvSpPr/>
+          <p:nvPr/>
+        </p:nvSpPr>
+        <p:spPr>
+          <a:xfrm>
+            <a:off x="9445752" y="3291840"/>
+            <a:ext cx="128016" cy="128016"/>
+          </a:xfrm>
+          <a:prstGeom prst="rightArrow">
+            <a:avLst/>
+          </a:prstGeom>
+          <a:solidFill>
+            <a:srgbClr val="FF6B35"/>
+          </a:solidFill>
+          <a:ln>
+            <a:noFill/>
+          </a:ln>
+        </p:spPr>
+        <p:style>
+          <a:lnRef idx="1">
+            <a:schemeClr val="accent1"/>
+          </a:lnRef>
+          <a:fillRef idx="3">
+            <a:schemeClr val="accent1"/>
+          </a:fillRef>
+          <a:effectRef idx="2">
+            <a:schemeClr val="accent1"/>
+          </a:effectRef>
+          <a:fontRef idx="minor">
+            <a:schemeClr val="lt1"/>
+          </a:fontRef>
+        </p:style>
+        <p:txBody>
+          <a:bodyPr rtlCol="0" anchor="ctr"/>
+          <a:lstStyle/>
+          <a:p>
+            <a:pPr algn="ctr"/>
+          </a:p>
+        </p:txBody>
+      </p:sp>
+      <p:sp>
+        <p:nvSpPr>
+          <p:cNvPr id="14" name="Rounded Rectangle 13"/>
+          <p:cNvSpPr/>
+          <p:nvPr/>
+        </p:nvSpPr>
+        <p:spPr>
+          <a:xfrm>
+            <a:off x="9601200" y="2011680"/>
+            <a:ext cx="1600200" cy="3108960"/>
+          </a:xfrm>
+          <a:prstGeom prst="roundRect">
+            <a:avLst/>
+          </a:prstGeom>
+          <a:solidFill>
+            <a:srgbClr val="FFFFFF"/>
+          </a:solidFill>
+          <a:ln w="19050">
+            <a:solidFill>
+              <a:srgbClr val="FF6B35"/>
+            </a:solidFill>
+          </a:ln>
+        </p:spPr>
+        <p:style>
+          <a:lnRef idx="1">
+            <a:schemeClr val="accent1"/>
+          </a:lnRef>
+          <a:fillRef idx="3">
+            <a:schemeClr val="accent1"/>
+          </a:fillRef>
+          <a:effectRef idx="2">
+            <a:schemeClr val="accent1"/>
+          </a:effectRef>
+          <a:fontRef idx="minor">
+            <a:schemeClr val="lt1"/>
+          </a:fontRef>
+        </p:style>
+        <p:txBody>
+          <a:bodyPr rtlCol="0" anchor="ctr" wrap="square" lIns="109728" rIns="109728" tIns="109728"/>
+          <a:lstStyle/>
+          <a:p>
+            <a:pPr algn="ctr">
+              <a:spcAft>
+                <a:spcPts val="500"/>
+              </a:spcAft>
+              <a:defRPr sz="1200" b="1">
+                <a:solidFill>
+                  <a:srgbClr val="FF6B35"/>
+                </a:solidFill>
+                <a:latin typeface="Arial"/>
+              </a:defRPr>
+            </a:pPr>
+            <a:r>
+              <a:t>BƯỚC 6</a:t>
+            </a:r>
+          </a:p>
+          <a:p>
+            <a:pPr>
+              <a:spcAft>
+                <a:spcPts val="800"/>
+              </a:spcAft>
+              <a:defRPr sz="1300" b="1">
+                <a:solidFill>
+                  <a:srgbClr val="2B2D42"/>
+                </a:solidFill>
+                <a:latin typeface="Arial"/>
+              </a:defRPr>
+            </a:pPr>
+            <a:r>
+              <a:t>Đi chợ</a:t>
+            </a:r>
+          </a:p>
+          <a:p>
+            <a:pPr>
+              <a:spcAft>
+                <a:spcPts val="500"/>
+              </a:spcAft>
+              <a:defRPr sz="1100" b="0">
+                <a:solidFill>
+                  <a:srgbClr val="8C919E"/>
+                </a:solidFill>
+                <a:latin typeface="Arial"/>
+              </a:defRPr>
+            </a:pPr>
+            <a:r>
+              <a:t>Tick chọn mua sắm hoàn thành &amp; Lưu lịch sử.</a:t>
             </a:r>
           </a:p>
         </p:txBody>
@@ -6049,7 +6939,7 @@
     <p:bg>
       <p:bgPr>
         <a:solidFill>
-          <a:srgbClr val="FAFAFA"/>
+          <a:srgbClr val="F5F7FA"/>
         </a:solidFill>
         <a:effectLst/>
       </p:bgPr>
@@ -6069,7 +6959,7 @@
         </p:nvSpPr>
         <p:spPr>
           <a:xfrm>
-            <a:off x="685800" y="457200"/>
+            <a:off x="685800" y="365760"/>
             <a:ext cx="10820095" cy="731520"/>
           </a:xfrm>
           <a:prstGeom prst="rect">
@@ -6084,7 +6974,7 @@
           <a:lstStyle/>
           <a:p>
             <a:pPr>
-              <a:defRPr sz="2600" b="1">
+              <a:defRPr sz="2400" b="1">
                 <a:solidFill>
                   <a:srgbClr val="2B2D42"/>
                 </a:solidFill>
@@ -6092,7 +6982,7 @@
               </a:defRPr>
             </a:pPr>
             <a:r>
-              <a:t>CHI TIẾT MÓN ĂN (DETAIL)</a:t>
+              <a:t>TRANG CHỦ &amp; TÌM KIẾM KHÔNG DẤU</a:t>
             </a:r>
           </a:p>
         </p:txBody>
@@ -6105,8 +6995,8 @@
         </p:nvSpPr>
         <p:spPr>
           <a:xfrm>
-            <a:off x="685800" y="1097280"/>
-            <a:ext cx="1097280" cy="45720"/>
+            <a:off x="685800" y="1051560"/>
+            <a:ext cx="1097280" cy="54864"/>
           </a:xfrm>
           <a:prstGeom prst="rect">
             <a:avLst/>
@@ -6115,9 +7005,7 @@
             <a:srgbClr val="FF6B35"/>
           </a:solidFill>
           <a:ln>
-            <a:solidFill>
-              <a:srgbClr val="FF6B35"/>
-            </a:solidFill>
+            <a:noFill/>
           </a:ln>
         </p:spPr>
         <p:style>
@@ -6166,9 +7054,9 @@
           <a:p>
             <a:pPr>
               <a:spcAft>
-                <a:spcPts val="800"/>
+                <a:spcPts val="600"/>
               </a:spcAft>
-              <a:defRPr sz="1800" b="1">
+              <a:defRPr sz="1700" b="1">
                 <a:solidFill>
                   <a:srgbClr val="FF6B35"/>
                 </a:solidFill>
@@ -6176,7 +7064,39 @@
               </a:defRPr>
             </a:pPr>
             <a:r>
-              <a:t>• Hiển thị thông số tổng quan:</a:t>
+              <a:t>• Giao diện Trang chủ (HomeFragment):</a:t>
+            </a:r>
+          </a:p>
+          <a:p>
+            <a:pPr>
+              <a:spcAft>
+                <a:spcPts val="400"/>
+              </a:spcAft>
+              <a:defRPr sz="1300" b="0">
+                <a:solidFill>
+                  <a:srgbClr val="2B2D42"/>
+                </a:solidFill>
+                <a:latin typeface="Arial"/>
+              </a:defRPr>
+            </a:pPr>
+            <a:r>
+              <a:t>- Phân chia Danh mục món ăn (Category) trực quan.</a:t>
+            </a:r>
+          </a:p>
+          <a:p>
+            <a:pPr>
+              <a:spcAft>
+                <a:spcPts val="400"/>
+              </a:spcAft>
+              <a:defRPr sz="1300" b="0">
+                <a:solidFill>
+                  <a:srgbClr val="2B2D42"/>
+                </a:solidFill>
+                <a:latin typeface="Arial"/>
+              </a:defRPr>
+            </a:pPr>
+            <a:r>
+              <a:t>- Gợi ý món ăn phổ biến (Popular Recipes) dựa trên đánh giá cao.</a:t>
             </a:r>
           </a:p>
           <a:p>
@@ -6184,7 +7104,7 @@
               <a:spcAft>
                 <a:spcPts val="1500"/>
               </a:spcAft>
-              <a:defRPr sz="1500" b="0">
+              <a:defRPr sz="1300" b="0">
                 <a:solidFill>
                   <a:srgbClr val="2B2D42"/>
                 </a:solidFill>
@@ -6192,15 +7112,15 @@
               </a:defRPr>
             </a:pPr>
             <a:r>
-              <a:t>   - Lượng Calo, thời gian nấu, độ khó, khẩu phần ăn.</a:t>
+              <a:t>- Món ngon ngẫu nhiên mỗi ngày (Today's Pick) tạo hứng thú.</a:t>
             </a:r>
           </a:p>
           <a:p>
             <a:pPr>
               <a:spcAft>
-                <a:spcPts val="800"/>
+                <a:spcPts val="600"/>
               </a:spcAft>
-              <a:defRPr sz="1800" b="1">
+              <a:defRPr sz="1700" b="1">
                 <a:solidFill>
                   <a:srgbClr val="FF6B35"/>
                 </a:solidFill>
@@ -6208,7 +7128,23 @@
               </a:defRPr>
             </a:pPr>
             <a:r>
-              <a:t>• Hướng dẫn chi tiết:</a:t>
+              <a:t>• Tìm kiếm thông minh (SearchFragment):</a:t>
+            </a:r>
+          </a:p>
+          <a:p>
+            <a:pPr>
+              <a:spcAft>
+                <a:spcPts val="400"/>
+              </a:spcAft>
+              <a:defRPr sz="1300" b="0">
+                <a:solidFill>
+                  <a:srgbClr val="2B2D42"/>
+                </a:solidFill>
+                <a:latin typeface="Arial"/>
+              </a:defRPr>
+            </a:pPr>
+            <a:r>
+              <a:t>- Chuẩn hóa không dấu StringHelper.removeAccents.</a:t>
             </a:r>
           </a:p>
           <a:p>
@@ -6216,7 +7152,7 @@
               <a:spcAft>
                 <a:spcPts val="500"/>
               </a:spcAft>
-              <a:defRPr sz="1500" b="0">
+              <a:defRPr sz="1300" b="0">
                 <a:solidFill>
                   <a:srgbClr val="2B2D42"/>
                 </a:solidFill>
@@ -6224,71 +7160,7 @@
               </a:defRPr>
             </a:pPr>
             <a:r>
-              <a:t>   - Danh sách nguyên liệu cần chuẩn bị (Ingredient).</a:t>
-            </a:r>
-          </a:p>
-          <a:p>
-            <a:pPr>
-              <a:spcAft>
-                <a:spcPts val="1500"/>
-              </a:spcAft>
-              <a:defRPr sz="1500" b="0">
-                <a:solidFill>
-                  <a:srgbClr val="2B2D42"/>
-                </a:solidFill>
-                <a:latin typeface="Arial"/>
-              </a:defRPr>
-            </a:pPr>
-            <a:r>
-              <a:t>   - Các bước nấu ăn chi tiết (Step) kèm hình ảnh trực quan.</a:t>
-            </a:r>
-          </a:p>
-          <a:p>
-            <a:pPr>
-              <a:spcAft>
-                <a:spcPts val="800"/>
-              </a:spcAft>
-              <a:defRPr sz="1800" b="1">
-                <a:solidFill>
-                  <a:srgbClr val="FF6B35"/>
-                </a:solidFill>
-                <a:latin typeface="Arial"/>
-              </a:defRPr>
-            </a:pPr>
-            <a:r>
-              <a:t>• Điểm chạm tương tác chính:</a:t>
-            </a:r>
-          </a:p>
-          <a:p>
-            <a:pPr>
-              <a:spcAft>
-                <a:spcPts val="500"/>
-              </a:spcAft>
-              <a:defRPr sz="1500" b="0">
-                <a:solidFill>
-                  <a:srgbClr val="2B2D42"/>
-                </a:solidFill>
-                <a:latin typeface="Arial"/>
-              </a:defRPr>
-            </a:pPr>
-            <a:r>
-              <a:t>   - Nút Yêu thích (Tim đỏ) cập nhật trạng thái yêu thích nhanh.</a:t>
-            </a:r>
-          </a:p>
-          <a:p>
-            <a:pPr>
-              <a:spcAft>
-                <a:spcPts val="500"/>
-              </a:spcAft>
-              <a:defRPr sz="1500" b="0">
-                <a:solidFill>
-                  <a:srgbClr val="2B2D42"/>
-                </a:solidFill>
-                <a:latin typeface="Arial"/>
-              </a:defRPr>
-            </a:pPr>
-            <a:r>
-              <a:t>   - Nút Thêm vào đi chợ: Tự động bóc nguyên liệu chuyển sang mục đi chợ tiện lợi.</a:t>
+              <a:t>- Gõ không dấu (ví dụ: 'nem cuon') vẫn hiển thị chính xác kết quả tiếng Việt, giúp tìm kiếm nhanh chóng.</a:t>
             </a:r>
           </a:p>
         </p:txBody>
@@ -6301,20 +7173,17 @@
         </p:nvSpPr>
         <p:spPr>
           <a:xfrm>
-            <a:off x="7772400" y="1645920"/>
-            <a:ext cx="2560320" cy="4389120"/>
+            <a:off x="6858000" y="1645920"/>
+            <a:ext cx="2286000" cy="4572000"/>
           </a:xfrm>
           <a:prstGeom prst="roundRect">
             <a:avLst/>
           </a:prstGeom>
           <a:solidFill>
-            <a:srgbClr val="F0F0F3"/>
+            <a:srgbClr val="2B2D42"/>
           </a:solidFill>
-          <a:ln w="19050">
-            <a:solidFill>
-              <a:srgbClr val="B4B4B9"/>
-            </a:solidFill>
-            <a:prstDash val="sysDash"/>
+          <a:ln>
+            <a:noFill/>
           </a:ln>
         </p:spPr>
         <p:style>
@@ -6332,6 +7201,52 @@
           </a:fontRef>
         </p:style>
         <p:txBody>
+          <a:bodyPr rtlCol="0" anchor="ctr"/>
+          <a:lstStyle/>
+          <a:p>
+            <a:pPr algn="ctr"/>
+          </a:p>
+        </p:txBody>
+      </p:sp>
+      <p:sp>
+        <p:nvSpPr>
+          <p:cNvPr id="6" name="Rectangle 5"/>
+          <p:cNvSpPr/>
+          <p:nvPr/>
+        </p:nvSpPr>
+        <p:spPr>
+          <a:xfrm>
+            <a:off x="6967728" y="1874520"/>
+            <a:ext cx="2066544" cy="4114800"/>
+          </a:xfrm>
+          <a:prstGeom prst="rect">
+            <a:avLst/>
+          </a:prstGeom>
+          <a:solidFill>
+            <a:srgbClr val="F8F9FC"/>
+          </a:solidFill>
+          <a:ln w="19050">
+            <a:solidFill>
+              <a:srgbClr val="D2D7DF"/>
+            </a:solidFill>
+            <a:prstDash val="sysDash"/>
+          </a:ln>
+        </p:spPr>
+        <p:style>
+          <a:lnRef idx="1">
+            <a:schemeClr val="accent1"/>
+          </a:lnRef>
+          <a:fillRef idx="3">
+            <a:schemeClr val="accent1"/>
+          </a:fillRef>
+          <a:effectRef idx="2">
+            <a:schemeClr val="accent1"/>
+          </a:effectRef>
+          <a:fontRef idx="minor">
+            <a:schemeClr val="lt1"/>
+          </a:fontRef>
+        </p:style>
+        <p:txBody>
           <a:bodyPr rtlCol="0" anchor="ctr" wrap="square" tIns="91440" bIns="91440"/>
           <a:lstStyle/>
           <a:p>
@@ -6347,17 +7262,208 @@
             <a:br/>
             <a:br/>
             <a:br/>
-            <a:r>
-              <a:t>[ Kéo ảnh ]</a:t>
-            </a:r>
             <a:br/>
             <a:r>
-              <a:t>Màn Chi tiết món ăn</a:t>
+              <a:t>[ Kéo ảnh chụp ]</a:t>
             </a:r>
             <a:br/>
             <a:r>
-              <a:t>(DetailActivity)</a:t>
-            </a:r>
+              <a:t>Màn Trang chủ</a:t>
+            </a:r>
+          </a:p>
+        </p:txBody>
+      </p:sp>
+      <p:sp>
+        <p:nvSpPr>
+          <p:cNvPr id="7" name="Rounded Rectangle 6"/>
+          <p:cNvSpPr/>
+          <p:nvPr/>
+        </p:nvSpPr>
+        <p:spPr>
+          <a:xfrm>
+            <a:off x="7635240" y="1709928"/>
+            <a:ext cx="731520" cy="128016"/>
+          </a:xfrm>
+          <a:prstGeom prst="roundRect">
+            <a:avLst/>
+          </a:prstGeom>
+          <a:solidFill>
+            <a:srgbClr val="0F0F0F"/>
+          </a:solidFill>
+          <a:ln>
+            <a:noFill/>
+          </a:ln>
+        </p:spPr>
+        <p:style>
+          <a:lnRef idx="1">
+            <a:schemeClr val="accent1"/>
+          </a:lnRef>
+          <a:fillRef idx="3">
+            <a:schemeClr val="accent1"/>
+          </a:fillRef>
+          <a:effectRef idx="2">
+            <a:schemeClr val="accent1"/>
+          </a:effectRef>
+          <a:fontRef idx="minor">
+            <a:schemeClr val="lt1"/>
+          </a:fontRef>
+        </p:style>
+        <p:txBody>
+          <a:bodyPr rtlCol="0" anchor="ctr"/>
+          <a:lstStyle/>
+          <a:p>
+            <a:pPr algn="ctr"/>
+          </a:p>
+        </p:txBody>
+      </p:sp>
+      <p:sp>
+        <p:nvSpPr>
+          <p:cNvPr id="8" name="Rounded Rectangle 7"/>
+          <p:cNvSpPr/>
+          <p:nvPr/>
+        </p:nvSpPr>
+        <p:spPr>
+          <a:xfrm>
+            <a:off x="9235440" y="1645920"/>
+            <a:ext cx="2286000" cy="4572000"/>
+          </a:xfrm>
+          <a:prstGeom prst="roundRect">
+            <a:avLst/>
+          </a:prstGeom>
+          <a:solidFill>
+            <a:srgbClr val="2B2D42"/>
+          </a:solidFill>
+          <a:ln>
+            <a:noFill/>
+          </a:ln>
+        </p:spPr>
+        <p:style>
+          <a:lnRef idx="1">
+            <a:schemeClr val="accent1"/>
+          </a:lnRef>
+          <a:fillRef idx="3">
+            <a:schemeClr val="accent1"/>
+          </a:fillRef>
+          <a:effectRef idx="2">
+            <a:schemeClr val="accent1"/>
+          </a:effectRef>
+          <a:fontRef idx="minor">
+            <a:schemeClr val="lt1"/>
+          </a:fontRef>
+        </p:style>
+        <p:txBody>
+          <a:bodyPr rtlCol="0" anchor="ctr"/>
+          <a:lstStyle/>
+          <a:p>
+            <a:pPr algn="ctr"/>
+          </a:p>
+        </p:txBody>
+      </p:sp>
+      <p:sp>
+        <p:nvSpPr>
+          <p:cNvPr id="9" name="Rectangle 8"/>
+          <p:cNvSpPr/>
+          <p:nvPr/>
+        </p:nvSpPr>
+        <p:spPr>
+          <a:xfrm>
+            <a:off x="9345168" y="1874520"/>
+            <a:ext cx="2066544" cy="4114800"/>
+          </a:xfrm>
+          <a:prstGeom prst="rect">
+            <a:avLst/>
+          </a:prstGeom>
+          <a:solidFill>
+            <a:srgbClr val="F8F9FC"/>
+          </a:solidFill>
+          <a:ln w="19050">
+            <a:solidFill>
+              <a:srgbClr val="D2D7DF"/>
+            </a:solidFill>
+            <a:prstDash val="sysDash"/>
+          </a:ln>
+        </p:spPr>
+        <p:style>
+          <a:lnRef idx="1">
+            <a:schemeClr val="accent1"/>
+          </a:lnRef>
+          <a:fillRef idx="3">
+            <a:schemeClr val="accent1"/>
+          </a:fillRef>
+          <a:effectRef idx="2">
+            <a:schemeClr val="accent1"/>
+          </a:effectRef>
+          <a:fontRef idx="minor">
+            <a:schemeClr val="lt1"/>
+          </a:fontRef>
+        </p:style>
+        <p:txBody>
+          <a:bodyPr rtlCol="0" anchor="ctr" wrap="square" tIns="91440" bIns="91440"/>
+          <a:lstStyle/>
+          <a:p>
+            <a:pPr algn="ctr">
+              <a:defRPr sz="1000" b="1">
+                <a:solidFill>
+                  <a:srgbClr val="8C919E"/>
+                </a:solidFill>
+                <a:latin typeface="Arial"/>
+              </a:defRPr>
+            </a:pPr>
+            <a:br/>
+            <a:br/>
+            <a:br/>
+            <a:br/>
+            <a:br/>
+            <a:r>
+              <a:t>[ Kéo ảnh chụp ]</a:t>
+            </a:r>
+            <a:br/>
+            <a:r>
+              <a:t>Màn Tìm kiếm</a:t>
+            </a:r>
+          </a:p>
+        </p:txBody>
+      </p:sp>
+      <p:sp>
+        <p:nvSpPr>
+          <p:cNvPr id="10" name="Rounded Rectangle 9"/>
+          <p:cNvSpPr/>
+          <p:nvPr/>
+        </p:nvSpPr>
+        <p:spPr>
+          <a:xfrm>
+            <a:off x="10012680" y="1709928"/>
+            <a:ext cx="731520" cy="128016"/>
+          </a:xfrm>
+          <a:prstGeom prst="roundRect">
+            <a:avLst/>
+          </a:prstGeom>
+          <a:solidFill>
+            <a:srgbClr val="0F0F0F"/>
+          </a:solidFill>
+          <a:ln>
+            <a:noFill/>
+          </a:ln>
+        </p:spPr>
+        <p:style>
+          <a:lnRef idx="1">
+            <a:schemeClr val="accent1"/>
+          </a:lnRef>
+          <a:fillRef idx="3">
+            <a:schemeClr val="accent1"/>
+          </a:fillRef>
+          <a:effectRef idx="2">
+            <a:schemeClr val="accent1"/>
+          </a:effectRef>
+          <a:fontRef idx="minor">
+            <a:schemeClr val="lt1"/>
+          </a:fontRef>
+        </p:style>
+        <p:txBody>
+          <a:bodyPr rtlCol="0" anchor="ctr"/>
+          <a:lstStyle/>
+          <a:p>
+            <a:pPr algn="ctr"/>
           </a:p>
         </p:txBody>
       </p:sp>
@@ -6375,7 +7481,7 @@
     <p:bg>
       <p:bgPr>
         <a:solidFill>
-          <a:srgbClr val="FAFAFA"/>
+          <a:srgbClr val="F5F7FA"/>
         </a:solidFill>
         <a:effectLst/>
       </p:bgPr>
@@ -6395,7 +7501,7 @@
         </p:nvSpPr>
         <p:spPr>
           <a:xfrm>
-            <a:off x="685800" y="457200"/>
+            <a:off x="685800" y="365760"/>
             <a:ext cx="10820095" cy="731520"/>
           </a:xfrm>
           <a:prstGeom prst="rect">
@@ -6410,7 +7516,7 @@
           <a:lstStyle/>
           <a:p>
             <a:pPr>
-              <a:defRPr sz="2600" b="1">
+              <a:defRPr sz="2400" b="1">
                 <a:solidFill>
                   <a:srgbClr val="2B2D42"/>
                 </a:solidFill>
@@ -6418,7 +7524,7 @@
               </a:defRPr>
             </a:pPr>
             <a:r>
-              <a:t>YÊU THÍCH &amp; THỐNG KÊ DINH DƯỠNG</a:t>
+              <a:t>CHI TIẾT MÓN ĂN (RECIPE DETAIL)</a:t>
             </a:r>
           </a:p>
         </p:txBody>
@@ -6431,8 +7537,8 @@
         </p:nvSpPr>
         <p:spPr>
           <a:xfrm>
-            <a:off x="685800" y="1097280"/>
-            <a:ext cx="1097280" cy="45720"/>
+            <a:off x="685800" y="1051560"/>
+            <a:ext cx="1097280" cy="54864"/>
           </a:xfrm>
           <a:prstGeom prst="rect">
             <a:avLst/>
@@ -6441,9 +7547,7 @@
             <a:srgbClr val="FF6B35"/>
           </a:solidFill>
           <a:ln>
-            <a:solidFill>
-              <a:srgbClr val="FF6B35"/>
-            </a:solidFill>
+            <a:noFill/>
           </a:ln>
         </p:spPr>
         <p:style>
@@ -6492,9 +7596,9 @@
           <a:p>
             <a:pPr>
               <a:spcAft>
-                <a:spcPts val="800"/>
+                <a:spcPts val="600"/>
               </a:spcAft>
-              <a:defRPr sz="1800" b="1">
+              <a:defRPr sz="1700" b="1">
                 <a:solidFill>
                   <a:srgbClr val="FF6B35"/>
                 </a:solidFill>
@@ -6502,7 +7606,87 @@
               </a:defRPr>
             </a:pPr>
             <a:r>
-              <a:t>• Quản lý Yêu thích (FavoritesFragment):</a:t>
+              <a:t>• Nội dung hiển thị chi tiết:</a:t>
+            </a:r>
+          </a:p>
+          <a:p>
+            <a:pPr>
+              <a:spcAft>
+                <a:spcPts val="400"/>
+              </a:spcAft>
+              <a:defRPr sz="1300" b="0">
+                <a:solidFill>
+                  <a:srgbClr val="2B2D42"/>
+                </a:solidFill>
+                <a:latin typeface="Arial"/>
+              </a:defRPr>
+            </a:pPr>
+            <a:r>
+              <a:t>- Trực quan hóa lượng Calo, thời gian nấu, độ khó và số phần ăn.</a:t>
+            </a:r>
+          </a:p>
+          <a:p>
+            <a:pPr>
+              <a:spcAft>
+                <a:spcPts val="400"/>
+              </a:spcAft>
+              <a:defRPr sz="1300" b="0">
+                <a:solidFill>
+                  <a:srgbClr val="2B2D42"/>
+                </a:solidFill>
+                <a:latin typeface="Arial"/>
+              </a:defRPr>
+            </a:pPr>
+            <a:r>
+              <a:t>- Danh sách nguyên liệu cần chuẩn bị cụ thể định lượng.</a:t>
+            </a:r>
+          </a:p>
+          <a:p>
+            <a:pPr>
+              <a:spcAft>
+                <a:spcPts val="1500"/>
+              </a:spcAft>
+              <a:defRPr sz="1300" b="0">
+                <a:solidFill>
+                  <a:srgbClr val="2B2D42"/>
+                </a:solidFill>
+                <a:latin typeface="Arial"/>
+              </a:defRPr>
+            </a:pPr>
+            <a:r>
+              <a:t>- Các bước nấu ăn (Steps) kèm hình ảnh mô tả rõ ràng.</a:t>
+            </a:r>
+          </a:p>
+          <a:p>
+            <a:pPr>
+              <a:spcAft>
+                <a:spcPts val="600"/>
+              </a:spcAft>
+              <a:defRPr sz="1700" b="1">
+                <a:solidFill>
+                  <a:srgbClr val="FF6B35"/>
+                </a:solidFill>
+                <a:latin typeface="Arial"/>
+              </a:defRPr>
+            </a:pPr>
+            <a:r>
+              <a:t>• Điểm kết nối nghiệp vụ:</a:t>
+            </a:r>
+          </a:p>
+          <a:p>
+            <a:pPr>
+              <a:spcAft>
+                <a:spcPts val="400"/>
+              </a:spcAft>
+              <a:defRPr sz="1300" b="0">
+                <a:solidFill>
+                  <a:srgbClr val="2B2D42"/>
+                </a:solidFill>
+                <a:latin typeface="Arial"/>
+              </a:defRPr>
+            </a:pPr>
+            <a:r>
+              <a:t>- Nút Thả tim: Thêm vào Yêu thích nhanh để lưu trữ.</a:t>
             </a:r>
           </a:p>
           <a:p>
@@ -6510,7 +7694,7 @@
               <a:spcAft>
                 <a:spcPts val="500"/>
               </a:spcAft>
-              <a:defRPr sz="1500" b="0">
+              <a:defRPr sz="1300" b="0">
                 <a:solidFill>
                   <a:srgbClr val="2B2D42"/>
                 </a:solidFill>
@@ -6518,71 +7702,7 @@
               </a:defRPr>
             </a:pPr>
             <a:r>
-              <a:t>   - Sử dụng khóa chính kết hợp (userId, recipeId) trong SQLite.</a:t>
-            </a:r>
-          </a:p>
-          <a:p>
-            <a:pPr>
-              <a:spcAft>
-                <a:spcPts val="1500"/>
-              </a:spcAft>
-              <a:defRPr sz="1500" b="0">
-                <a:solidFill>
-                  <a:srgbClr val="2B2D42"/>
-                </a:solidFill>
-                <a:latin typeface="Arial"/>
-              </a:defRPr>
-            </a:pPr>
-            <a:r>
-              <a:t>   - Lọc sắp xếp theo Ngày thêm, tiêu đề A-Z, và Độ khó (CASE WHEN).</a:t>
-            </a:r>
-          </a:p>
-          <a:p>
-            <a:pPr>
-              <a:spcAft>
-                <a:spcPts val="800"/>
-              </a:spcAft>
-              <a:defRPr sz="1800" b="1">
-                <a:solidFill>
-                  <a:srgbClr val="FF6B35"/>
-                </a:solidFill>
-                <a:latin typeface="Arial"/>
-              </a:defRPr>
-            </a:pPr>
-            <a:r>
-              <a:t>• Thẻ thống kê dinh dưỡng thông minh:</a:t>
-            </a:r>
-          </a:p>
-          <a:p>
-            <a:pPr>
-              <a:spcAft>
-                <a:spcPts val="500"/>
-              </a:spcAft>
-              <a:defRPr sz="1500" b="0">
-                <a:solidFill>
-                  <a:srgbClr val="2B2D42"/>
-                </a:solidFill>
-                <a:latin typeface="Arial"/>
-              </a:defRPr>
-            </a:pPr>
-            <a:r>
-              <a:t>   - Hiển thị: Tổng số món đã lưu, Calo trung bình, Thời gian nấu trung bình.</a:t>
-            </a:r>
-          </a:p>
-          <a:p>
-            <a:pPr>
-              <a:spcAft>
-                <a:spcPts val="500"/>
-              </a:spcAft>
-              <a:defRPr sz="1500" b="0">
-                <a:solidFill>
-                  <a:srgbClr val="2B2D42"/>
-                </a:solidFill>
-                <a:latin typeface="Arial"/>
-              </a:defRPr>
-            </a:pPr>
-            <a:r>
-              <a:t>   - Tối ưu hiệu năng: Tính toán trực tiếp bằng Java trên danh sách nạp sẵn ở bộ nhớ đệm RAM, không gọi SQL tính trung bình giúp giảm tải I/O ghi đĩa SQLite.</a:t>
+              <a:t>- Nút Đi chợ: Tự động trích lọc toàn bộ nguyên liệu cần mua sang giỏ đi chợ chỉ với một lần click.</a:t>
             </a:r>
           </a:p>
         </p:txBody>
@@ -6596,19 +7716,16 @@
         <p:spPr>
           <a:xfrm>
             <a:off x="7772400" y="1645920"/>
-            <a:ext cx="2560320" cy="4389120"/>
+            <a:ext cx="2286000" cy="4572000"/>
           </a:xfrm>
           <a:prstGeom prst="roundRect">
             <a:avLst/>
           </a:prstGeom>
           <a:solidFill>
-            <a:srgbClr val="F0F0F3"/>
+            <a:srgbClr val="2B2D42"/>
           </a:solidFill>
-          <a:ln w="19050">
-            <a:solidFill>
-              <a:srgbClr val="B4B4B9"/>
-            </a:solidFill>
-            <a:prstDash val="sysDash"/>
+          <a:ln>
+            <a:noFill/>
           </a:ln>
         </p:spPr>
         <p:style>
@@ -6626,6 +7743,52 @@
           </a:fontRef>
         </p:style>
         <p:txBody>
+          <a:bodyPr rtlCol="0" anchor="ctr"/>
+          <a:lstStyle/>
+          <a:p>
+            <a:pPr algn="ctr"/>
+          </a:p>
+        </p:txBody>
+      </p:sp>
+      <p:sp>
+        <p:nvSpPr>
+          <p:cNvPr id="6" name="Rectangle 5"/>
+          <p:cNvSpPr/>
+          <p:nvPr/>
+        </p:nvSpPr>
+        <p:spPr>
+          <a:xfrm>
+            <a:off x="7882128" y="1874520"/>
+            <a:ext cx="2066544" cy="4114800"/>
+          </a:xfrm>
+          <a:prstGeom prst="rect">
+            <a:avLst/>
+          </a:prstGeom>
+          <a:solidFill>
+            <a:srgbClr val="F8F9FC"/>
+          </a:solidFill>
+          <a:ln w="19050">
+            <a:solidFill>
+              <a:srgbClr val="D2D7DF"/>
+            </a:solidFill>
+            <a:prstDash val="sysDash"/>
+          </a:ln>
+        </p:spPr>
+        <p:style>
+          <a:lnRef idx="1">
+            <a:schemeClr val="accent1"/>
+          </a:lnRef>
+          <a:fillRef idx="3">
+            <a:schemeClr val="accent1"/>
+          </a:fillRef>
+          <a:effectRef idx="2">
+            <a:schemeClr val="accent1"/>
+          </a:effectRef>
+          <a:fontRef idx="minor">
+            <a:schemeClr val="lt1"/>
+          </a:fontRef>
+        </p:style>
+        <p:txBody>
           <a:bodyPr rtlCol="0" anchor="ctr" wrap="square" tIns="91440" bIns="91440"/>
           <a:lstStyle/>
           <a:p>
@@ -6641,17 +7804,57 @@
             <a:br/>
             <a:br/>
             <a:br/>
-            <a:r>
-              <a:t>[ Kéo ảnh ]</a:t>
-            </a:r>
             <a:br/>
             <a:r>
-              <a:t>Màn Yêu thích</a:t>
+              <a:t>[ Kéo ảnh chụp ]</a:t>
             </a:r>
             <a:br/>
             <a:r>
-              <a:t>(FavoritesFragment)</a:t>
-            </a:r>
+              <a:t>Màn Chi tiết công thức</a:t>
+            </a:r>
+          </a:p>
+        </p:txBody>
+      </p:sp>
+      <p:sp>
+        <p:nvSpPr>
+          <p:cNvPr id="7" name="Rounded Rectangle 6"/>
+          <p:cNvSpPr/>
+          <p:nvPr/>
+        </p:nvSpPr>
+        <p:spPr>
+          <a:xfrm>
+            <a:off x="8549640" y="1709928"/>
+            <a:ext cx="731520" cy="128016"/>
+          </a:xfrm>
+          <a:prstGeom prst="roundRect">
+            <a:avLst/>
+          </a:prstGeom>
+          <a:solidFill>
+            <a:srgbClr val="0F0F0F"/>
+          </a:solidFill>
+          <a:ln>
+            <a:noFill/>
+          </a:ln>
+        </p:spPr>
+        <p:style>
+          <a:lnRef idx="1">
+            <a:schemeClr val="accent1"/>
+          </a:lnRef>
+          <a:fillRef idx="3">
+            <a:schemeClr val="accent1"/>
+          </a:fillRef>
+          <a:effectRef idx="2">
+            <a:schemeClr val="accent1"/>
+          </a:effectRef>
+          <a:fontRef idx="minor">
+            <a:schemeClr val="lt1"/>
+          </a:fontRef>
+        </p:style>
+        <p:txBody>
+          <a:bodyPr rtlCol="0" anchor="ctr"/>
+          <a:lstStyle/>
+          <a:p>
+            <a:pPr algn="ctr"/>
           </a:p>
         </p:txBody>
       </p:sp>
@@ -6669,7 +7872,7 @@
     <p:bg>
       <p:bgPr>
         <a:solidFill>
-          <a:srgbClr val="FAFAFA"/>
+          <a:srgbClr val="F5F7FA"/>
         </a:solidFill>
         <a:effectLst/>
       </p:bgPr>
@@ -6689,7 +7892,7 @@
         </p:nvSpPr>
         <p:spPr>
           <a:xfrm>
-            <a:off x="685800" y="457200"/>
+            <a:off x="685800" y="365760"/>
             <a:ext cx="10820095" cy="731520"/>
           </a:xfrm>
           <a:prstGeom prst="rect">
@@ -6704,7 +7907,7 @@
           <a:lstStyle/>
           <a:p>
             <a:pPr>
-              <a:defRPr sz="2600" b="1">
+              <a:defRPr sz="2400" b="1">
                 <a:solidFill>
                   <a:srgbClr val="2B2D42"/>
                 </a:solidFill>
@@ -6712,7 +7915,7 @@
               </a:defRPr>
             </a:pPr>
             <a:r>
-              <a:t>DANH SÁCH ĐI CHỢ &amp; LỊCH SỬ NẤU ĂN</a:t>
+              <a:t>LƯU TRỮ YÊU THÍCH &amp; THỐNG KÊ</a:t>
             </a:r>
           </a:p>
         </p:txBody>
@@ -6725,8 +7928,8 @@
         </p:nvSpPr>
         <p:spPr>
           <a:xfrm>
-            <a:off x="685800" y="1097280"/>
-            <a:ext cx="1097280" cy="45720"/>
+            <a:off x="685800" y="1051560"/>
+            <a:ext cx="1097280" cy="54864"/>
           </a:xfrm>
           <a:prstGeom prst="rect">
             <a:avLst/>
@@ -6735,9 +7938,7 @@
             <a:srgbClr val="FF6B35"/>
           </a:solidFill>
           <a:ln>
-            <a:solidFill>
-              <a:srgbClr val="FF6B35"/>
-            </a:solidFill>
+            <a:noFill/>
           </a:ln>
         </p:spPr>
         <p:style>
@@ -6786,9 +7987,9 @@
           <a:p>
             <a:pPr>
               <a:spcAft>
-                <a:spcPts val="800"/>
+                <a:spcPts val="600"/>
               </a:spcAft>
-              <a:defRPr sz="1800" b="1">
+              <a:defRPr sz="1700" b="1">
                 <a:solidFill>
                   <a:srgbClr val="FF6B35"/>
                 </a:solidFill>
@@ -6796,7 +7997,71 @@
               </a:defRPr>
             </a:pPr>
             <a:r>
-              <a:t>• Danh sách đi chợ (GroceryListFragment):</a:t>
+              <a:t>• Quản lý Yêu thích (FavoritesFragment):</a:t>
+            </a:r>
+          </a:p>
+          <a:p>
+            <a:pPr>
+              <a:spcAft>
+                <a:spcPts val="400"/>
+              </a:spcAft>
+              <a:defRPr sz="1300" b="0">
+                <a:solidFill>
+                  <a:srgbClr val="2B2D42"/>
+                </a:solidFill>
+                <a:latin typeface="Arial"/>
+              </a:defRPr>
+            </a:pPr>
+            <a:r>
+              <a:t>- Khóa chính kết hợp (userId, recipeId) tránh trùng lặp dữ liệu.</a:t>
+            </a:r>
+          </a:p>
+          <a:p>
+            <a:pPr>
+              <a:spcAft>
+                <a:spcPts val="1500"/>
+              </a:spcAft>
+              <a:defRPr sz="1300" b="0">
+                <a:solidFill>
+                  <a:srgbClr val="2B2D42"/>
+                </a:solidFill>
+                <a:latin typeface="Arial"/>
+              </a:defRPr>
+            </a:pPr>
+            <a:r>
+              <a:t>- Sắp xếp đa dạng: Mới nhất, Tiêu đề A-Z, Độ khó (SQL CASE WHEN chuyển đổi độ khó sang thang điểm 1, 2, 3).</a:t>
+            </a:r>
+          </a:p>
+          <a:p>
+            <a:pPr>
+              <a:spcAft>
+                <a:spcPts val="600"/>
+              </a:spcAft>
+              <a:defRPr sz="1700" b="1">
+                <a:solidFill>
+                  <a:srgbClr val="FF6B35"/>
+                </a:solidFill>
+                <a:latin typeface="Arial"/>
+              </a:defRPr>
+            </a:pPr>
+            <a:r>
+              <a:t>• Thẻ thống kê dinh dưỡng thông minh (Stats Card):</a:t>
+            </a:r>
+          </a:p>
+          <a:p>
+            <a:pPr>
+              <a:spcAft>
+                <a:spcPts val="400"/>
+              </a:spcAft>
+              <a:defRPr sz="1300" b="0">
+                <a:solidFill>
+                  <a:srgbClr val="2B2D42"/>
+                </a:solidFill>
+                <a:latin typeface="Arial"/>
+              </a:defRPr>
+            </a:pPr>
+            <a:r>
+              <a:t>- Thống kê tổng số món, trung bình Calo, trung bình thời gian nấu.</a:t>
             </a:r>
           </a:p>
           <a:p>
@@ -6804,7 +8069,7 @@
               <a:spcAft>
                 <a:spcPts val="500"/>
               </a:spcAft>
-              <a:defRPr sz="1500" b="0">
+              <a:defRPr sz="1300" b="0">
                 <a:solidFill>
                   <a:srgbClr val="2B2D42"/>
                 </a:solidFill>
@@ -6812,87 +8077,7 @@
               </a:defRPr>
             </a:pPr>
             <a:r>
-              <a:t>   - RecyclerView lồng nhau (Nested RV): Gom nhóm nguyên liệu theo món ăn gốc.</a:t>
-            </a:r>
-          </a:p>
-          <a:p>
-            <a:pPr>
-              <a:spcAft>
-                <a:spcPts val="500"/>
-              </a:spcAft>
-              <a:defRPr sz="1500" b="0">
-                <a:solidFill>
-                  <a:srgbClr val="2B2D42"/>
-                </a:solidFill>
-                <a:latin typeface="Arial"/>
-              </a:defRPr>
-            </a:pPr>
-            <a:r>
-              <a:t>   - Cho phép thêm nguyên liệu ngoài tự do (recipeId = NULL).</a:t>
-            </a:r>
-          </a:p>
-          <a:p>
-            <a:pPr>
-              <a:spcAft>
-                <a:spcPts val="500"/>
-              </a:spcAft>
-              <a:defRPr sz="1500" b="0">
-                <a:solidFill>
-                  <a:srgbClr val="2B2D42"/>
-                </a:solidFill>
-                <a:latin typeface="Arial"/>
-              </a:defRPr>
-            </a:pPr>
-            <a:r>
-              <a:t>   - Callback Interface đồng bộ trạng thái check mua lên SQLite.</a:t>
-            </a:r>
-          </a:p>
-          <a:p>
-            <a:pPr>
-              <a:spcAft>
-                <a:spcPts val="1500"/>
-              </a:spcAft>
-              <a:defRPr sz="1500" b="0">
-                <a:solidFill>
-                  <a:srgbClr val="2B2D42"/>
-                </a:solidFill>
-                <a:latin typeface="Arial"/>
-              </a:defRPr>
-            </a:pPr>
-            <a:r>
-              <a:t>   - ProgressBar thông minh đổi sang màu xanh ngọc khi mua đủ đồ.</a:t>
-            </a:r>
-          </a:p>
-          <a:p>
-            <a:pPr>
-              <a:spcAft>
-                <a:spcPts val="800"/>
-              </a:spcAft>
-              <a:defRPr sz="1800" b="1">
-                <a:solidFill>
-                  <a:srgbClr val="FF6B35"/>
-                </a:solidFill>
-                <a:latin typeface="Arial"/>
-              </a:defRPr>
-            </a:pPr>
-            <a:r>
-              <a:t>• Lịch sử nấu ăn (Cook History):</a:t>
-            </a:r>
-          </a:p>
-          <a:p>
-            <a:pPr>
-              <a:spcAft>
-                <a:spcPts val="500"/>
-              </a:spcAft>
-              <a:defRPr sz="1500" b="0">
-                <a:solidFill>
-                  <a:srgbClr val="2B2D42"/>
-                </a:solidFill>
-                <a:latin typeface="Arial"/>
-              </a:defRPr>
-            </a:pPr>
-            <a:r>
-              <a:t>   - Ghi nhận món ăn sau khi nấu thành công vào bảng CookHistory để phục vụ thống kê cá nhân.</a:t>
+              <a:t>- Giải pháp hiệu năng: Tính toán trực tiếp bằng Java trên danh sách món ăn đang cache tại RAM, loại bỏ truy vấn SQL phụ giúp tối ưu pin và tốc độ.</a:t>
             </a:r>
           </a:p>
         </p:txBody>
@@ -6906,19 +8091,16 @@
         <p:spPr>
           <a:xfrm>
             <a:off x="7772400" y="1645920"/>
-            <a:ext cx="2560320" cy="4389120"/>
+            <a:ext cx="2286000" cy="4572000"/>
           </a:xfrm>
           <a:prstGeom prst="roundRect">
             <a:avLst/>
           </a:prstGeom>
           <a:solidFill>
-            <a:srgbClr val="F0F0F3"/>
+            <a:srgbClr val="2B2D42"/>
           </a:solidFill>
-          <a:ln w="19050">
-            <a:solidFill>
-              <a:srgbClr val="B4B4B9"/>
-            </a:solidFill>
-            <a:prstDash val="sysDash"/>
+          <a:ln>
+            <a:noFill/>
           </a:ln>
         </p:spPr>
         <p:style>
@@ -6936,6 +8118,52 @@
           </a:fontRef>
         </p:style>
         <p:txBody>
+          <a:bodyPr rtlCol="0" anchor="ctr"/>
+          <a:lstStyle/>
+          <a:p>
+            <a:pPr algn="ctr"/>
+          </a:p>
+        </p:txBody>
+      </p:sp>
+      <p:sp>
+        <p:nvSpPr>
+          <p:cNvPr id="6" name="Rectangle 5"/>
+          <p:cNvSpPr/>
+          <p:nvPr/>
+        </p:nvSpPr>
+        <p:spPr>
+          <a:xfrm>
+            <a:off x="7882128" y="1874520"/>
+            <a:ext cx="2066544" cy="4114800"/>
+          </a:xfrm>
+          <a:prstGeom prst="rect">
+            <a:avLst/>
+          </a:prstGeom>
+          <a:solidFill>
+            <a:srgbClr val="F8F9FC"/>
+          </a:solidFill>
+          <a:ln w="19050">
+            <a:solidFill>
+              <a:srgbClr val="D2D7DF"/>
+            </a:solidFill>
+            <a:prstDash val="sysDash"/>
+          </a:ln>
+        </p:spPr>
+        <p:style>
+          <a:lnRef idx="1">
+            <a:schemeClr val="accent1"/>
+          </a:lnRef>
+          <a:fillRef idx="3">
+            <a:schemeClr val="accent1"/>
+          </a:fillRef>
+          <a:effectRef idx="2">
+            <a:schemeClr val="accent1"/>
+          </a:effectRef>
+          <a:fontRef idx="minor">
+            <a:schemeClr val="lt1"/>
+          </a:fontRef>
+        </p:style>
+        <p:txBody>
           <a:bodyPr rtlCol="0" anchor="ctr" wrap="square" tIns="91440" bIns="91440"/>
           <a:lstStyle/>
           <a:p>
@@ -6951,17 +8179,57 @@
             <a:br/>
             <a:br/>
             <a:br/>
-            <a:r>
-              <a:t>[ Kéo ảnh ]</a:t>
-            </a:r>
             <a:br/>
             <a:r>
-              <a:t>Màn Đi chợ</a:t>
+              <a:t>[ Kéo ảnh chụp ]</a:t>
             </a:r>
             <a:br/>
             <a:r>
-              <a:t>(GroceryListFragment)</a:t>
-            </a:r>
+              <a:t>Màn Yêu thích</a:t>
+            </a:r>
+          </a:p>
+        </p:txBody>
+      </p:sp>
+      <p:sp>
+        <p:nvSpPr>
+          <p:cNvPr id="7" name="Rounded Rectangle 6"/>
+          <p:cNvSpPr/>
+          <p:nvPr/>
+        </p:nvSpPr>
+        <p:spPr>
+          <a:xfrm>
+            <a:off x="8549640" y="1709928"/>
+            <a:ext cx="731520" cy="128016"/>
+          </a:xfrm>
+          <a:prstGeom prst="roundRect">
+            <a:avLst/>
+          </a:prstGeom>
+          <a:solidFill>
+            <a:srgbClr val="0F0F0F"/>
+          </a:solidFill>
+          <a:ln>
+            <a:noFill/>
+          </a:ln>
+        </p:spPr>
+        <p:style>
+          <a:lnRef idx="1">
+            <a:schemeClr val="accent1"/>
+          </a:lnRef>
+          <a:fillRef idx="3">
+            <a:schemeClr val="accent1"/>
+          </a:fillRef>
+          <a:effectRef idx="2">
+            <a:schemeClr val="accent1"/>
+          </a:effectRef>
+          <a:fontRef idx="minor">
+            <a:schemeClr val="lt1"/>
+          </a:fontRef>
+        </p:style>
+        <p:txBody>
+          <a:bodyPr rtlCol="0" anchor="ctr"/>
+          <a:lstStyle/>
+          <a:p>
+            <a:pPr algn="ctr"/>
           </a:p>
         </p:txBody>
       </p:sp>
@@ -6979,7 +8247,7 @@
     <p:bg>
       <p:bgPr>
         <a:solidFill>
-          <a:srgbClr val="FAFAFA"/>
+          <a:srgbClr val="F5F7FA"/>
         </a:solidFill>
         <a:effectLst/>
       </p:bgPr>
@@ -6999,7 +8267,7 @@
         </p:nvSpPr>
         <p:spPr>
           <a:xfrm>
-            <a:off x="685800" y="457200"/>
+            <a:off x="685800" y="365760"/>
             <a:ext cx="10820095" cy="731520"/>
           </a:xfrm>
           <a:prstGeom prst="rect">
@@ -7014,7 +8282,7 @@
           <a:lstStyle/>
           <a:p>
             <a:pPr>
-              <a:defRPr sz="2600" b="1">
+              <a:defRPr sz="2400" b="1">
                 <a:solidFill>
                   <a:srgbClr val="2B2D42"/>
                 </a:solidFill>
@@ -7022,7 +8290,7 @@
               </a:defRPr>
             </a:pPr>
             <a:r>
-              <a:t>XÁC THỰC, CÁ NHÂN &amp; KẾ HOẠCH TƯƠNG LAI</a:t>
+              <a:t>DANH SÁCH ĐI CHỢ &amp; LỊCH SỬ NẤU ĂN</a:t>
             </a:r>
           </a:p>
         </p:txBody>
@@ -7035,8 +8303,8 @@
         </p:nvSpPr>
         <p:spPr>
           <a:xfrm>
-            <a:off x="685800" y="1097280"/>
-            <a:ext cx="1097280" cy="45720"/>
+            <a:off x="685800" y="1051560"/>
+            <a:ext cx="1097280" cy="54864"/>
           </a:xfrm>
           <a:prstGeom prst="rect">
             <a:avLst/>
@@ -7045,9 +8313,7 @@
             <a:srgbClr val="FF6B35"/>
           </a:solidFill>
           <a:ln>
-            <a:solidFill>
-              <a:srgbClr val="FF6B35"/>
-            </a:solidFill>
+            <a:noFill/>
           </a:ln>
         </p:spPr>
         <p:style>
@@ -7074,14 +8340,133 @@
       </p:sp>
       <p:sp>
         <p:nvSpPr>
-          <p:cNvPr id="4" name="Rounded Rectangle 3"/>
+          <p:cNvPr id="4" name="TextBox 3"/>
+          <p:cNvSpPr txBox="1"/>
+          <p:nvPr/>
+        </p:nvSpPr>
+        <p:spPr>
+          <a:xfrm>
+            <a:off x="685800" y="1645920"/>
+            <a:ext cx="5486400" cy="4389120"/>
+          </a:xfrm>
+          <a:prstGeom prst="rect">
+            <a:avLst/>
+          </a:prstGeom>
+          <a:noFill/>
+        </p:spPr>
+        <p:txBody>
+          <a:bodyPr wrap="square">
+            <a:spAutoFit/>
+          </a:bodyPr>
+          <a:lstStyle/>
+          <a:p>
+            <a:pPr>
+              <a:spcAft>
+                <a:spcPts val="600"/>
+              </a:spcAft>
+              <a:defRPr sz="1700" b="1">
+                <a:solidFill>
+                  <a:srgbClr val="FF6B35"/>
+                </a:solidFill>
+                <a:latin typeface="Arial"/>
+              </a:defRPr>
+            </a:pPr>
+            <a:r>
+              <a:t>• Danh sách đi chợ (GroceryListFragment):</a:t>
+            </a:r>
+          </a:p>
+          <a:p>
+            <a:pPr>
+              <a:spcAft>
+                <a:spcPts val="400"/>
+              </a:spcAft>
+              <a:defRPr sz="1300" b="0">
+                <a:solidFill>
+                  <a:srgbClr val="2B2D42"/>
+                </a:solidFill>
+                <a:latin typeface="Arial"/>
+              </a:defRPr>
+            </a:pPr>
+            <a:r>
+              <a:t>- RecyclerView lồng nhau (Nested RV): Gom nhóm nguyên liệu khoa học theo từng món ăn. Nhóm phụ 'Mua thêm' cho nguyên liệu tự thêm thủ công.</a:t>
+            </a:r>
+          </a:p>
+          <a:p>
+            <a:pPr>
+              <a:spcAft>
+                <a:spcPts val="400"/>
+              </a:spcAft>
+              <a:defRPr sz="1300" b="0">
+                <a:solidFill>
+                  <a:srgbClr val="2B2D42"/>
+                </a:solidFill>
+                <a:latin typeface="Arial"/>
+              </a:defRPr>
+            </a:pPr>
+            <a:r>
+              <a:t>- Đồng bộ Checkbox: Thay đổi trạng thái mua lên SQLite tức thời thông qua Interface Callback giữa adapter con và Fragment.</a:t>
+            </a:r>
+          </a:p>
+          <a:p>
+            <a:pPr>
+              <a:spcAft>
+                <a:spcPts val="1500"/>
+              </a:spcAft>
+              <a:defRPr sz="1300" b="0">
+                <a:solidFill>
+                  <a:srgbClr val="2B2D42"/>
+                </a:solidFill>
+                <a:latin typeface="Arial"/>
+              </a:defRPr>
+            </a:pPr>
+            <a:r>
+              <a:t>- Tiến độ ProgressBar: Tự động đổi sang màu xanh ngọc khi mua đủ đồ.</a:t>
+            </a:r>
+          </a:p>
+          <a:p>
+            <a:pPr>
+              <a:spcAft>
+                <a:spcPts val="600"/>
+              </a:spcAft>
+              <a:defRPr sz="1700" b="1">
+                <a:solidFill>
+                  <a:srgbClr val="FF6B35"/>
+                </a:solidFill>
+                <a:latin typeface="Arial"/>
+              </a:defRPr>
+            </a:pPr>
+            <a:r>
+              <a:t>• Lịch sử nấu ăn (Cook History):</a:t>
+            </a:r>
+          </a:p>
+          <a:p>
+            <a:pPr>
+              <a:spcAft>
+                <a:spcPts val="500"/>
+              </a:spcAft>
+              <a:defRPr sz="1300" b="0">
+                <a:solidFill>
+                  <a:srgbClr val="2B2D42"/>
+                </a:solidFill>
+                <a:latin typeface="Arial"/>
+              </a:defRPr>
+            </a:pPr>
+            <a:r>
+              <a:t>- Ghi nhận món ăn sau khi hoàn thành nấu nướng để hiển thị thống kê cá nhân.</a:t>
+            </a:r>
+          </a:p>
+        </p:txBody>
+      </p:sp>
+      <p:sp>
+        <p:nvSpPr>
+          <p:cNvPr id="5" name="Rounded Rectangle 4"/>
           <p:cNvSpPr/>
           <p:nvPr/>
         </p:nvSpPr>
         <p:spPr>
           <a:xfrm>
-            <a:off x="685800" y="1645920"/>
-            <a:ext cx="5120640" cy="4114800"/>
+            <a:off x="7772400" y="1645920"/>
+            <a:ext cx="2286000" cy="4572000"/>
           </a:xfrm>
           <a:prstGeom prst="roundRect">
             <a:avLst/>
@@ -7090,9 +8475,7 @@
             <a:srgbClr val="2B2D42"/>
           </a:solidFill>
           <a:ln>
-            <a:solidFill>
-              <a:srgbClr val="2B2D42"/>
-            </a:solidFill>
+            <a:noFill/>
           </a:ln>
         </p:spPr>
         <p:style>
@@ -7110,95 +8493,35 @@
           </a:fontRef>
         </p:style>
         <p:txBody>
-          <a:bodyPr rtlCol="0" anchor="ctr" wrap="square" lIns="274320" rIns="274320" tIns="274320"/>
-          <a:lstStyle/>
-          <a:p>
-            <a:pPr algn="ctr">
-              <a:spcAft>
-                <a:spcPts val="1500"/>
-              </a:spcAft>
-              <a:defRPr sz="1800" b="1">
-                <a:solidFill>
-                  <a:srgbClr val="FF6B35"/>
-                </a:solidFill>
-                <a:latin typeface="Arial"/>
-              </a:defRPr>
-            </a:pPr>
-            <a:r>
-              <a:t>KẾT QUẢ ĐÃ ĐẠT ĐƯỢC</a:t>
-            </a:r>
-          </a:p>
-          <a:p>
-            <a:pPr>
-              <a:spcAft>
-                <a:spcPts val="800"/>
-              </a:spcAft>
-              <a:defRPr sz="1500" b="0">
-                <a:solidFill>
-                  <a:srgbClr val="FFFFFF"/>
-                </a:solidFill>
-                <a:latin typeface="Arial"/>
-              </a:defRPr>
-            </a:pPr>
-            <a:r>
-              <a:t>✓ Hoàn thành luồng nghiệp vụ khép kín.</a:t>
-            </a:r>
-          </a:p>
-          <a:p>
-            <a:pPr>
-              <a:spcAft>
-                <a:spcPts val="800"/>
-              </a:spcAft>
-              <a:defRPr sz="1500" b="0">
-                <a:solidFill>
-                  <a:srgbClr val="FFFFFF"/>
-                </a:solidFill>
-                <a:latin typeface="Arial"/>
-              </a:defRPr>
-            </a:pPr>
-            <a:r>
-              <a:t>✓ Tạo thành công CSDL SQLite offline tối ưu, tự động dọn dẹp bằng cascade khóa ngoại.</a:t>
-            </a:r>
-          </a:p>
-          <a:p>
-            <a:pPr>
-              <a:spcAft>
-                <a:spcPts val="800"/>
-              </a:spcAft>
-              <a:defRPr sz="1500" b="0">
-                <a:solidFill>
-                  <a:srgbClr val="FFFFFF"/>
-                </a:solidFill>
-                <a:latin typeface="Arial"/>
-              </a:defRPr>
-            </a:pPr>
-            <a:r>
-              <a:t>✓ Giao diện mượt mà, tối giản hóa lượng truy cập đĩa cứng thông qua cache dữ liệu trên RAM.</a:t>
-            </a:r>
-          </a:p>
-        </p:txBody>
-      </p:sp>
-      <p:sp>
-        <p:nvSpPr>
-          <p:cNvPr id="5" name="Rounded Rectangle 4"/>
+          <a:bodyPr rtlCol="0" anchor="ctr"/>
+          <a:lstStyle/>
+          <a:p>
+            <a:pPr algn="ctr"/>
+          </a:p>
+        </p:txBody>
+      </p:sp>
+      <p:sp>
+        <p:nvSpPr>
+          <p:cNvPr id="6" name="Rectangle 5"/>
           <p:cNvSpPr/>
           <p:nvPr/>
         </p:nvSpPr>
         <p:spPr>
           <a:xfrm>
-            <a:off x="6382512" y="1645920"/>
-            <a:ext cx="5120640" cy="4114800"/>
-          </a:xfrm>
-          <a:prstGeom prst="roundRect">
+            <a:off x="7882128" y="1874520"/>
+            <a:ext cx="2066544" cy="4114800"/>
+          </a:xfrm>
+          <a:prstGeom prst="rect">
             <a:avLst/>
           </a:prstGeom>
           <a:solidFill>
-            <a:srgbClr val="FFFFFF"/>
+            <a:srgbClr val="F8F9FC"/>
           </a:solidFill>
-          <a:ln>
+          <a:ln w="19050">
             <a:solidFill>
-              <a:srgbClr val="B4B4B9"/>
+              <a:srgbClr val="D2D7DF"/>
             </a:solidFill>
+            <a:prstDash val="sysDash"/>
           </a:ln>
         </p:spPr>
         <p:style>
@@ -7216,71 +8539,72 @@
           </a:fontRef>
         </p:style>
         <p:txBody>
-          <a:bodyPr rtlCol="0" anchor="ctr" wrap="square" lIns="274320" rIns="274320" tIns="274320"/>
+          <a:bodyPr rtlCol="0" anchor="ctr" wrap="square" tIns="91440" bIns="91440"/>
           <a:lstStyle/>
           <a:p>
             <a:pPr algn="ctr">
-              <a:spcAft>
-                <a:spcPts val="1500"/>
-              </a:spcAft>
-              <a:defRPr sz="1800" b="1">
-                <a:solidFill>
-                  <a:srgbClr val="FF6B35"/>
-                </a:solidFill>
-                <a:latin typeface="Arial"/>
-              </a:defRPr>
-            </a:pPr>
-            <a:r>
-              <a:t>KẾ HOẠCH PHÁT TRIỂN</a:t>
-            </a:r>
-          </a:p>
-          <a:p>
-            <a:pPr>
-              <a:spcAft>
-                <a:spcPts val="800"/>
-              </a:spcAft>
-              <a:defRPr sz="1500" b="0">
-                <a:solidFill>
-                  <a:srgbClr val="2B2D42"/>
-                </a:solidFill>
-                <a:latin typeface="Arial"/>
-              </a:defRPr>
-            </a:pPr>
-            <a:r>
-              <a:t>• Tăng cường bảo mật: Tích hợp mã hóa mật khẩu tài khoản bằng BCrypt/SHA-256.</a:t>
-            </a:r>
-          </a:p>
-          <a:p>
-            <a:pPr>
-              <a:spcAft>
-                <a:spcPts val="800"/>
-              </a:spcAft>
-              <a:defRPr sz="1500" b="0">
-                <a:solidFill>
-                  <a:srgbClr val="2B2D42"/>
-                </a:solidFill>
-                <a:latin typeface="Arial"/>
-              </a:defRPr>
-            </a:pPr>
-            <a:r>
-              <a:t>• Đồng bộ đám mây: Chuyển đổi dữ liệu offline SQLite lên máy chủ trực tuyến (Firebase/MySQL).</a:t>
-            </a:r>
-          </a:p>
-          <a:p>
-            <a:pPr>
-              <a:spcAft>
-                <a:spcPts val="800"/>
-              </a:spcAft>
-              <a:defRPr sz="1500" b="0">
-                <a:solidFill>
-                  <a:srgbClr val="2B2D42"/>
-                </a:solidFill>
-                <a:latin typeface="Arial"/>
-              </a:defRPr>
-            </a:pPr>
-            <a:r>
-              <a:t>• Tính năng AI: Gợi ý thực đơn thông minh dựa trên sở thích và calo tiêu thụ hàng ngày.</a:t>
-            </a:r>
+              <a:defRPr sz="1000" b="1">
+                <a:solidFill>
+                  <a:srgbClr val="8C919E"/>
+                </a:solidFill>
+                <a:latin typeface="Arial"/>
+              </a:defRPr>
+            </a:pPr>
+            <a:br/>
+            <a:br/>
+            <a:br/>
+            <a:br/>
+            <a:br/>
+            <a:r>
+              <a:t>[ Kéo ảnh chụp ]</a:t>
+            </a:r>
+            <a:br/>
+            <a:r>
+              <a:t>Màn Danh sách đi chợ</a:t>
+            </a:r>
+          </a:p>
+        </p:txBody>
+      </p:sp>
+      <p:sp>
+        <p:nvSpPr>
+          <p:cNvPr id="7" name="Rounded Rectangle 6"/>
+          <p:cNvSpPr/>
+          <p:nvPr/>
+        </p:nvSpPr>
+        <p:spPr>
+          <a:xfrm>
+            <a:off x="8549640" y="1709928"/>
+            <a:ext cx="731520" cy="128016"/>
+          </a:xfrm>
+          <a:prstGeom prst="roundRect">
+            <a:avLst/>
+          </a:prstGeom>
+          <a:solidFill>
+            <a:srgbClr val="0F0F0F"/>
+          </a:solidFill>
+          <a:ln>
+            <a:noFill/>
+          </a:ln>
+        </p:spPr>
+        <p:style>
+          <a:lnRef idx="1">
+            <a:schemeClr val="accent1"/>
+          </a:lnRef>
+          <a:fillRef idx="3">
+            <a:schemeClr val="accent1"/>
+          </a:fillRef>
+          <a:effectRef idx="2">
+            <a:schemeClr val="accent1"/>
+          </a:effectRef>
+          <a:fontRef idx="minor">
+            <a:schemeClr val="lt1"/>
+          </a:fontRef>
+        </p:style>
+        <p:txBody>
+          <a:bodyPr rtlCol="0" anchor="ctr"/>
+          <a:lstStyle/>
+          <a:p>
+            <a:pPr algn="ctr"/>
           </a:p>
         </p:txBody>
       </p:sp>
